--- a/en/slides/06-Computer_Architecture-Number_Representation_Reals.pptx
+++ b/en/slides/06-Computer_Architecture-Number_Representation_Reals.pptx
@@ -126,13 +126,13 @@
   <p:extLst>
     <p:ext uri="{521415D9-36F7-43E2-AB2F-B90AF26B5E84}">
       <p14:sectionLst xmlns:p14="http://schemas.microsoft.com/office/powerpoint/2010/main">
-        <p14:section name="Opening" id="{06a3dfb1-6de6-939d-fc60-8a8f52763354}">
+        <p14:section name="Opening" id="{13d33f7b-cf8f-9323-bc8d-a23b5ca002cb}">
           <p14:sldIdLst>
             <p14:sldId id="256"/>
             <p14:sldId id="257"/>
           </p14:sldIdLst>
         </p14:section>
-        <p14:section name="More encodings for signed integers" id="{7c34cb15-b34c-1f4a-9c5e-9ed4224fe28d}">
+        <p14:section name="More encodings for signed integers" id="{f823a02c-a199-6788-1ac5-f77a47729386}">
           <p14:sldIdLst>
             <p14:sldId id="258"/>
             <p14:sldId id="259"/>
@@ -140,13 +140,13 @@
             <p14:sldId id="261"/>
           </p14:sldIdLst>
         </p14:section>
-        <p14:section name="Fixed point" id="{1b4a98c6-bfe9-19c9-7920-0767eb963788}">
+        <p14:section name="Fixed point" id="{6f0b90e6-1de3-4581-31f7-bf0639d1762a}">
           <p14:sldIdLst>
             <p14:sldId id="262"/>
             <p14:sldId id="263"/>
           </p14:sldIdLst>
         </p14:section>
-        <p14:section name="Floating point" id="{25dd95be-af33-dfe8-23f9-e505d0dd3dee}">
+        <p14:section name="Floating point" id="{c7c62ca5-ae3b-aa67-228e-943c6f8856bb}">
           <p14:sldIdLst>
             <p14:sldId id="264"/>
             <p14:sldId id="265"/>
@@ -156,7 +156,7 @@
             <p14:sldId id="269"/>
           </p14:sldIdLst>
         </p14:section>
-        <p14:section name="Back to the machine" id="{6f137eb0-5884-400f-8f8c-80de41070759}">
+        <p14:section name="Back to the machine" id="{9d9fbf32-6415-723e-bfce-bf8c4c8529c5}">
           <p14:sldIdLst>
             <p14:sldId id="270"/>
             <p14:sldId id="271"/>
@@ -3294,7 +3294,63 @@
       </p:sp>
       <p:sp>
         <p:nvSpPr>
-          <p:cNvPr id="12" name="Shape 10"/>
+          <p:cNvPr id="12" name="Text 10"/>
+          <p:cNvSpPr txBox="1"/>
+          <p:nvPr/>
+        </p:nvSpPr>
+        <p:spPr>
+          <a:xfrm>
+            <a:off x="4693615" y="566928"/>
+            <a:ext cx="6949440" cy="640080"/>
+          </a:xfrm>
+          <a:prstGeom prst="rect">
+            <a:avLst/>
+          </a:prstGeom>
+          <a:noFill/>
+          <a:ln/>
+        </p:spPr>
+        <p:txBody>
+          <a:bodyPr wrap="square" lIns="0" tIns="0" rIns="0" bIns="0" rtlCol="0" anchor="t"/>
+          <a:lstStyle/>
+          <a:p>
+            <a:pPr algn="r" indent="0" marL="0">
+              <a:buNone/>
+            </a:pPr>
+            <a:r>
+              <a:rPr lang="en-US" sz="1300" dirty="0">
+                <a:solidFill>
+                  <a:srgbClr val="CFE3EA"/>
+                </a:solidFill>
+                <a:latin typeface="Calibri" pitchFamily="34" charset="0"/>
+                <a:ea typeface="Calibri" pitchFamily="34" charset="-122"/>
+                <a:cs typeface="Calibri" pitchFamily="34" charset="-120"/>
+              </a:rPr>
+              <a:t>Lecture deck. The listings, the complete program and how to test it are in the code deck:</a:t>
+            </a:r>
+            <a:endParaRPr lang="en-US" sz="1300" dirty="0"/>
+          </a:p>
+          <a:p>
+            <a:pPr algn="r" indent="0" marL="0">
+              <a:buNone/>
+            </a:pPr>
+            <a:r>
+              <a:rPr lang="en-US" sz="1300" dirty="0">
+                <a:solidFill>
+                  <a:srgbClr val="CFE3EA"/>
+                </a:solidFill>
+                <a:latin typeface="Calibri" pitchFamily="34" charset="0"/>
+                <a:ea typeface="Calibri" pitchFamily="34" charset="-122"/>
+                <a:cs typeface="Calibri" pitchFamily="34" charset="-120"/>
+              </a:rPr>
+              <a:t>06-Computer_Architecture-Number_Representation_Reals-Code.pptx</a:t>
+            </a:r>
+            <a:endParaRPr lang="en-US" sz="1300" dirty="0"/>
+          </a:p>
+        </p:txBody>
+      </p:sp>
+      <p:sp>
+        <p:nvSpPr>
+          <p:cNvPr id="13" name="Shape 11"/>
           <p:cNvSpPr/>
           <p:nvPr/>
         </p:nvSpPr>
@@ -3321,7 +3377,7 @@
       </p:sp>
       <p:pic>
         <p:nvPicPr>
-          <p:cNvPr id="13" name="Image 0" descr="/Users/raffaelemontella/devel/riscv-prg32/computer-architecture-with-prg32/tools/assets/game_raycaster.png">    </p:cNvPr>
+          <p:cNvPr id="14" name="Image 0" descr="/Users/raffaelemontella/devel/riscv-prg32/computer-architecture-with-prg32/tools/assets/game_raycaster.png">    </p:cNvPr>
           <p:cNvPicPr>
             <a:picLocks noChangeAspect="1"/>
           </p:cNvPicPr>

--- a/en/slides/06-Computer_Architecture-Number_Representation_Reals.pptx
+++ b/en/slides/06-Computer_Architecture-Number_Representation_Reals.pptx
@@ -126,13 +126,13 @@
   <p:extLst>
     <p:ext uri="{521415D9-36F7-43E2-AB2F-B90AF26B5E84}">
       <p14:sectionLst xmlns:p14="http://schemas.microsoft.com/office/powerpoint/2010/main">
-        <p14:section name="Opening" id="{13d33f7b-cf8f-9323-bc8d-a23b5ca002cb}">
+        <p14:section name="Opening" id="{57cffda0-f76d-06dc-a987-7057ef12ac49}">
           <p14:sldIdLst>
             <p14:sldId id="256"/>
             <p14:sldId id="257"/>
           </p14:sldIdLst>
         </p14:section>
-        <p14:section name="More encodings for signed integers" id="{f823a02c-a199-6788-1ac5-f77a47729386}">
+        <p14:section name="More encodings for signed integers" id="{98f21a5a-33a9-3d0c-b858-c4630b70dec4}">
           <p14:sldIdLst>
             <p14:sldId id="258"/>
             <p14:sldId id="259"/>
@@ -140,13 +140,13 @@
             <p14:sldId id="261"/>
           </p14:sldIdLst>
         </p14:section>
-        <p14:section name="Fixed point" id="{6f0b90e6-1de3-4581-31f7-bf0639d1762a}">
+        <p14:section name="Fixed point" id="{55ed587e-d625-6850-6e68-d060c23736ba}">
           <p14:sldIdLst>
             <p14:sldId id="262"/>
             <p14:sldId id="263"/>
           </p14:sldIdLst>
         </p14:section>
-        <p14:section name="Floating point" id="{c7c62ca5-ae3b-aa67-228e-943c6f8856bb}">
+        <p14:section name="Floating point" id="{5169d299-71dd-4e03-2867-4f9bcdbeb138}">
           <p14:sldIdLst>
             <p14:sldId id="264"/>
             <p14:sldId id="265"/>
@@ -156,7 +156,7 @@
             <p14:sldId id="269"/>
           </p14:sldIdLst>
         </p14:section>
-        <p14:section name="Back to the machine" id="{9d9fbf32-6415-723e-bfce-bf8c4c8529c5}">
+        <p14:section name="Back to the machine" id="{415c41a1-ccdf-58f6-3304-678135d37c01}">
           <p14:sldIdLst>
             <p14:sldId id="270"/>
             <p14:sldId id="271"/>
@@ -571,6 +571,8 @@
             <a:r>
               <a:rPr lang="en-US" dirty="0"/>
               <a:t>The previous lecture dealt with whole numbers. This one deals with numbers that have a fractional part, and it starts from a practical problem: a ball that must move by less than one pixel per frame, on a processor that has no instructions for real numbers. The solution, fixed point, uses only what you already know. Floating point then appears as the general answer, with the standard that every computer follows, IEEE 754.
+Learning status: UNDERSTAND NOW, by the end of this lecture you explain it, trace it and apply it on your own; USE NOW, you follow and use the recipe today; how it works inside is explained later, or is not part of the course; UNDERSTAND LATER, recognise the name and what it is for; a later lecture explains it. A slide without a badge is context: a story, an example, a question, an exercise.
+Learning status of this lecture. UNDERSTAND NOW: fixed point; one's complement and excess-k; IEEE 754 floating point; the name RV32IMAC. USE NOW: the complete program, the PRG32 tools (used, not studied, in this course). UNDERSTAND LATER: nothing. A slide without a badge is context: a story, an example, a question, an exercise.
 For the lecturer: Spiral: the lecture opens with a ball that must move less than one pixel per frame on a processor with no floating-point unit. Fixed point solves it; floating point is then presented as the general answer, with IEEE 754.</a:t>
             </a:r>
             <a:endParaRPr lang="en-US" dirty="0"/>
@@ -660,6 +662,7 @@
             <a:r>
               <a:rPr lang="en-US" dirty="0"/>
               <a:t>In floating point the distance between two consecutive representable numbers is not constant. Near zero they are extremely close together; near the upper limit they are far apart. The absolute error therefore grows with the size of the number. What stays constant is the relative error, because every number has the same number of significant digits: four in this example. It is the opposite of fixed point, where the absolute error is constant and the relative error becomes large near zero.
+UNDERSTAND NOW: IEEE 754 floating point.
 For the lecturer: This is the opposite of fixed point, where the absolute error is constant and the relative error explodes near zero.</a:t>
             </a:r>
             <a:endParaRPr lang="en-US" dirty="0"/>
@@ -749,6 +752,7 @@
             <a:r>
               <a:rPr lang="en-US" dirty="0"/>
               <a:t>The single-precision format of IEEE 754 divides 32 bits into three fields: one bit of sign, eight of exponent, twenty-three of fraction. The value is given by the formula in the middle. Two details deserve attention. A normalised binary mantissa always begins with 1, so that bit is not stored: it is the hidden bit, and it gives one more bit of precision for free. And the exponent is stored in excess-127, the encoding of the previous section, so that exponents can be compared as natural numbers.
+UNDERSTAND NOW: IEEE 754 floating point.
 For the lecturer: IEEE 754 dates from 1985 (revised 2008 and 2019). Before it, every manufacturer had its own format and programs gave different results on different machines.</a:t>
             </a:r>
             <a:endParaRPr lang="en-US" dirty="0"/>
@@ -838,6 +842,7 @@
             <a:r>
               <a:rPr lang="en-US" dirty="0"/>
               <a:t>A complete example: minus 5.125. Convert the two parts to binary: 5 is 101 and 0.125 is 0.001, so the number is 101.001. Normalise by moving the point two places: 1.01001 times 2 to the 2. The sign bit is 1. The exponent field is 2 plus 127, 129, that is 1000 0001. The fraction is 01001 followed by zeros, without the leading 1. Putting the three fields together and regrouping in fours gives 0xC0A40000. Redo it on paper, then try with another number.
+UNDERSTAND NOW: IEEE 754 floating point.
 For the lecturer: Check the regrouping in nibbles: 1100 = C, 0000 = 0, 1010 = A, 0100 = 4, then zeros. Three slides of the source deck are merged here.</a:t>
             </a:r>
             <a:endParaRPr lang="en-US" dirty="0"/>
@@ -927,6 +932,7 @@
             <a:r>
               <a:rPr lang="en-US" dirty="0"/>
               <a:t>Single and double precision side by side. Double precision has 64 bits, 11 of exponent in excess-1023 and 52 of fraction. Two rows are worth remembering as orders of magnitude: single precision gives about 7 significant decimal digits and reaches about 10 to the 38; double precision gives about 16 digits and reaches about 10 to the 308. The types float and double of the C language are these two formats.
+UNDERSTAND NOW: IEEE 754 floating point.
 For the lecturer: Corrections to the source table: the double-precision exponent is in excess-1023 (not 1024), and the decimal ranges are about 10^38 and 10^308.</a:t>
             </a:r>
             <a:endParaRPr lang="en-US" dirty="0"/>
@@ -1016,6 +1022,7 @@
             <a:r>
               <a:rPr lang="en-US" dirty="0"/>
               <a:t>Not all the patterns are ordinary numbers. An exponent field between the two extremes is a normalised number. An exponent of all zeros means zero, if the fraction is zero too, or a denormalised number, which fills the gap around zero with decreasing precision. An exponent of all ones means infinity, if the fraction is zero, or NaN, "not a number", the result of an invalid operation such as zero divided by zero. Note that there are two zeros, plus and minus, and that NaN is not equal to anything, itself included.
+UNDERSTAND NOW: IEEE 754 floating point.
 For the lecturer: Denormalised (subnormal) numbers fill the underflow gap around zero with gradually decreasing precision. 1/0 gives infinity; 0/0 and the square root of -1 give NaN. NaN is not equal to anything, itself included.</a:t>
             </a:r>
             <a:endParaRPr lang="en-US" dirty="0"/>
@@ -1105,6 +1112,7 @@
             <a:r>
               <a:rPr lang="en-US" dirty="0"/>
               <a:t>RISC-V handles floating point through two optional extensions, F for single precision and D for double: they add thirty-two registers, f0 to f31, and instructions such as fadd.s. The processor of the kit, RV32IMAC, has neither. A C program can still use float, but each operation becomes a call to a software routine that costs tens or hundreds of integer instructions. This is why PRG32 games use integers and fixed point: they are fast, exact enough, and visible in the debugger.
+UNDERSTAND NOW: IEEE 754 floating point.
 For the lecturer: The software routines implement exactly the algorithm of this lecture with shifts, masks and integer additions: a good reading exercise for the end of the course.</a:t>
             </a:r>
             <a:endParaRPr lang="en-US" dirty="0"/>
@@ -1194,6 +1202,7 @@
             <a:r>
               <a:rPr lang="en-US" dirty="0"/>
               <a:t>The name RV32IMAC can now be read letter by letter. RV32I is the base: 32-bit registers and the integer instructions. M adds multiplication and division. A adds the atomic instructions for sharing data safely between tasks. C adds compressed, 16-bit encodings of the most common instructions. F and D, the floating-point extensions, are absent. This modularity is a design choice of RISC-V: a small mandatory base and optional extensions, so that the same architecture fits a cheap microcontroller and a supercomputer.
+UNDERSTAND NOW: the name RV32IMAC.
 For the lecturer: RISC-V is modular: a small mandatory base plus optional extensions. A microcontroller picks what it needs; this is one reason the same architecture scales from a two-euro chip to a supercomputer.</a:t>
             </a:r>
             <a:endParaRPr lang="en-US" dirty="0"/>
@@ -1641,6 +1650,7 @@
             <a:r>
               <a:rPr lang="en-US" dirty="0"/>
               <a:t>Five conclusions. Integers have several representations, chosen according to use. Fixed point stores a fraction as a scaled integer: constant absolute error, the speed of integers. Floating point stores mantissa and exponent: an enormous range, constant relative error. IEEE 754 is the universal standard, with special patterns for zero, infinity and NaN. And on a processor without the F extension, fixed point is the natural choice. Next comes the first part of Verm1, where the last four lectures are put to work.
+Learning status, recap. UNDERSTAND NOW: fixed point; one's complement and excess-k; IEEE 754 floating point; the name RV32IMAC. USE NOW: the complete program, the PRG32 tools (used, not studied, in this course). UNDERSTAND LATER: nothing. A slide without a badge is context: a story, an example, a question, an exercise.
 For the lecturer: Next: Verm1, part 1, where the first four lectures go to work in a real program. Then Boolean algebra.</a:t>
             </a:r>
             <a:endParaRPr lang="en-US" dirty="0"/>
@@ -1730,6 +1740,7 @@
             <a:r>
               <a:rPr lang="en-US" dirty="0"/>
               <a:t>In one's complement a negative number is obtained by inverting every bit of the positive one: 6 is 0110, minus 6 is 1001. Changing sign is as simple as it can be. The price is the same as for sign and magnitude: zero has two representations, 0000 and 1111, and the range is symmetric, from minus 7 to plus 7 on four bits. The instruction not of RISC-V computes exactly the one's complement of a register.
+UNDERSTAND NOW: one's complement and excess-k.
 For the lecturer: Also called diminished radix complement (complemento alla base diminuita). The bitwise not of RISC-V computes exactly this.</a:t>
             </a:r>
             <a:endParaRPr lang="en-US" dirty="0"/>
@@ -1819,6 +1830,7 @@
             <a:r>
               <a:rPr lang="en-US" dirty="0"/>
               <a:t>Addition in one's complement works with the ordinary adder, with one correction: when there is a carry out of the leftmost bit, 1 must be added to the result. It is called the end-around carry. The first example needs no correction. In the second and third, the carry out is brought round and added. The extra step and the double zero are the reasons why two's complement, in which the carry is simply discarded, won.
+UNDERSTAND NOW: one's complement and excess-k.
 For the lecturer: The source slides call the carry an 'overflow in the arithmetic of positive integers': it is the carry out of the natural-number adder, reinterpreted as the need for a correction.</a:t>
             </a:r>
             <a:endParaRPr lang="en-US" dirty="0"/>
@@ -1908,6 +1920,7 @@
             <a:r>
               <a:rPr lang="en-US" dirty="0"/>
               <a:t>In excess-k every number is shifted upward by a constant: X = x + k. With four bits and k = 8, the pattern 0000 means minus 8, 1000 means zero and 1111 means plus 7. The valuable property is that order is preserved: a larger number always has a larger pattern, so two signed numbers can be compared as if they were naturals. Arithmetic is less convenient, because every sum must be corrected. This is the encoding of the exponent in floating-point numbers.
+UNDERSTAND NOW: one's complement and excess-k.
 For the lecturer: Excess-8 on four bits: 0000 = -8, 1000 = 0, 1111 = +7. Compare with two's complement: the same range, with the most significant bit inverted.</a:t>
             </a:r>
             <a:endParaRPr lang="en-US" dirty="0"/>
@@ -1997,6 +2010,7 @@
             <a:r>
               <a:rPr lang="en-US" dirty="0"/>
               <a:t>The table of Lecture 05 with two more columns: the same sixteen patterns read as unsigned, sign and magnitude, one's complement, two's complement and excess-8. Three observations. Sign and magnitude and one's complement have two zeros, highlighted. Two's complement and excess-8 cover the same range, minus 8 to plus 7, and differ only in the leftmost bit. And excess-8 is the only column in which the values grow steadily from the top to the bottom of the table.
+UNDERSTAND NOW: one's complement and excess-k.
 For the lecturer: This table replaces the comparison picture of the source deck ('Numeri relativi: complementi').</a:t>
             </a:r>
             <a:endParaRPr lang="en-US" dirty="0"/>
@@ -2086,6 +2100,7 @@
             <a:r>
               <a:rPr lang="en-US" dirty="0"/>
               <a:t>In fixed point the integer part and the fractional part sit side by side in one word, and the position of the point is fixed. It is not stored anywhere: it is an agreement that the program knows. If f bits are reserved for the fraction, the word contains the number multiplied by 2 to the f, and the smallest step that can be represented, the resolution, is 2 to the minus f. The notation Qm.f says how the bits are divided: Q24.8 means 24 integer bits and 8 fractional bits.
+UNDERSTAND NOW: fixed point.
 For the lecturer: Fixed point is how games, audio and control software handle fractions on processors without a floating-point unit. It is also how money should be stored: integer cents.</a:t>
             </a:r>
             <a:endParaRPr lang="en-US" dirty="0"/>
@@ -2175,6 +2190,7 @@
             <a:r>
               <a:rPr lang="en-US" dirty="0"/>
               <a:t>The real numbers are dense: between any two there are infinitely many others, so with a finite number of bits most of them cannot be represented, and each is replaced by the nearest representable one. In Q24.8 the number 0.1 becomes 26/256, about 0.1016. The error is at most half the resolution. A number too close to zero becomes zero: this is underflow, and it is why a speed of 0.001 pixels per frame would leave the ball still. In fixed point the absolute error is the same everywhere.
+UNDERSTAND NOW: fixed point.
 For the lecturer: 0.1 x 256 = 25.6, rounded to 26. With SPEED_Q8 = 1 the ball moves 1/256 pixel per frame; a speed of 0.001 pixel per frame underflows to zero and the ball never moves.</a:t>
             </a:r>
             <a:endParaRPr lang="en-US" dirty="0"/>
@@ -2264,6 +2280,7 @@
             <a:r>
               <a:rPr lang="en-US" dirty="0"/>
               <a:t>A real number is written as a pair: a mantissa m and an exponent e, such that x is m times the base raised to e. It is the scientific notation of the physics laboratory. The point "floats" because the exponent says where it is. Since the same number has infinitely many such pairs, one is chosen by a rule, normalisation: the point is placed just after the first significant digit, so 346.09801 becomes 3.4609801 with exponent 2.
+UNDERSTAND NOW: IEEE 754 floating point.
 For the lecturer: Scientific notation, in other words. Fixed point spends its bits on a fixed range; floating point spends some bits to say where the range is.</a:t>
             </a:r>
             <a:endParaRPr lang="en-US" dirty="0"/>
@@ -3401,6 +3418,420 @@
       </p:pic>
       <p:sp>
         <p:nvSpPr>
+          <p:cNvPr id="15" name="Shape 12"/>
+          <p:cNvSpPr/>
+          <p:nvPr/>
+        </p:nvSpPr>
+        <p:spPr>
+          <a:xfrm>
+            <a:off x="9690303" y="91440"/>
+            <a:ext cx="1952752" cy="274320"/>
+          </a:xfrm>
+          <a:prstGeom prst="rect">
+            <a:avLst/>
+          </a:prstGeom>
+          <a:solidFill>
+            <a:srgbClr val="F3E8FF"/>
+          </a:solidFill>
+          <a:ln w="12700">
+            <a:solidFill>
+              <a:srgbClr val="7E22CE"/>
+            </a:solidFill>
+            <a:prstDash val="dash"/>
+          </a:ln>
+        </p:spPr>
+      </p:sp>
+      <p:sp>
+        <p:nvSpPr>
+          <p:cNvPr id="16" name="Shape 13"/>
+          <p:cNvSpPr/>
+          <p:nvPr/>
+        </p:nvSpPr>
+        <p:spPr>
+          <a:xfrm>
+            <a:off x="9717735" y="128016"/>
+            <a:ext cx="45720" cy="45720"/>
+          </a:xfrm>
+          <a:prstGeom prst="rect">
+            <a:avLst/>
+          </a:prstGeom>
+          <a:solidFill>
+            <a:srgbClr val="7E22CE"/>
+          </a:solidFill>
+          <a:ln w="12700">
+            <a:solidFill>
+              <a:srgbClr val="7E22CE"/>
+            </a:solidFill>
+            <a:prstDash val="solid"/>
+          </a:ln>
+        </p:spPr>
+      </p:sp>
+      <p:sp>
+        <p:nvSpPr>
+          <p:cNvPr id="17" name="Shape 14"/>
+          <p:cNvSpPr/>
+          <p:nvPr/>
+        </p:nvSpPr>
+        <p:spPr>
+          <a:xfrm>
+            <a:off x="9717735" y="205740"/>
+            <a:ext cx="45720" cy="45720"/>
+          </a:xfrm>
+          <a:prstGeom prst="rect">
+            <a:avLst/>
+          </a:prstGeom>
+          <a:solidFill>
+            <a:srgbClr val="7E22CE"/>
+          </a:solidFill>
+          <a:ln w="12700">
+            <a:solidFill>
+              <a:srgbClr val="7E22CE"/>
+            </a:solidFill>
+            <a:prstDash val="solid"/>
+          </a:ln>
+        </p:spPr>
+      </p:sp>
+      <p:sp>
+        <p:nvSpPr>
+          <p:cNvPr id="18" name="Shape 15"/>
+          <p:cNvSpPr/>
+          <p:nvPr/>
+        </p:nvSpPr>
+        <p:spPr>
+          <a:xfrm>
+            <a:off x="9717735" y="283464"/>
+            <a:ext cx="45720" cy="45720"/>
+          </a:xfrm>
+          <a:prstGeom prst="rect">
+            <a:avLst/>
+          </a:prstGeom>
+          <a:solidFill>
+            <a:srgbClr val="7E22CE"/>
+          </a:solidFill>
+          <a:ln w="12700">
+            <a:solidFill>
+              <a:srgbClr val="7E22CE"/>
+            </a:solidFill>
+            <a:prstDash val="solid"/>
+          </a:ln>
+        </p:spPr>
+      </p:sp>
+      <p:pic>
+        <p:nvPicPr>
+          <p:cNvPr id="19" name="Image 1" descr="preencoded.png">    </p:cNvPr>
+          <p:cNvPicPr>
+            <a:picLocks noChangeAspect="1"/>
+          </p:cNvPicPr>
+          <p:nvPr/>
+        </p:nvPicPr>
+        <p:blipFill>
+          <a:blip r:embed="rId2"/>
+          <a:stretch>
+            <a:fillRect/>
+          </a:stretch>
+        </p:blipFill>
+        <p:spPr>
+          <a:xfrm>
+            <a:off x="9818319" y="128016"/>
+            <a:ext cx="201168" cy="201168"/>
+          </a:xfrm>
+          <a:prstGeom prst="rect">
+            <a:avLst/>
+          </a:prstGeom>
+        </p:spPr>
+      </p:pic>
+      <p:sp>
+        <p:nvSpPr>
+          <p:cNvPr id="20" name="Text 16"/>
+          <p:cNvSpPr txBox="1"/>
+          <p:nvPr/>
+        </p:nvSpPr>
+        <p:spPr>
+          <a:xfrm>
+            <a:off x="10074351" y="91440"/>
+            <a:ext cx="1532128" cy="274320"/>
+          </a:xfrm>
+          <a:prstGeom prst="rect">
+            <a:avLst/>
+          </a:prstGeom>
+          <a:noFill/>
+          <a:ln/>
+        </p:spPr>
+        <p:txBody>
+          <a:bodyPr wrap="square" lIns="0" tIns="0" rIns="0" bIns="0" rtlCol="0" anchor="ctr"/>
+          <a:lstStyle/>
+          <a:p>
+            <a:pPr indent="0" marL="0">
+              <a:buNone/>
+            </a:pPr>
+            <a:r>
+              <a:rPr lang="en-US" sz="1100" b="1" dirty="0">
+                <a:solidFill>
+                  <a:srgbClr val="6B21A8"/>
+                </a:solidFill>
+                <a:latin typeface="Calibri" pitchFamily="34" charset="0"/>
+                <a:ea typeface="Calibri" pitchFamily="34" charset="-122"/>
+                <a:cs typeface="Calibri" pitchFamily="34" charset="-120"/>
+              </a:rPr>
+              <a:t>UNDERSTAND LATER</a:t>
+            </a:r>
+            <a:endParaRPr lang="en-US" sz="1100" dirty="0"/>
+          </a:p>
+        </p:txBody>
+      </p:sp>
+      <p:sp>
+        <p:nvSpPr>
+          <p:cNvPr id="21" name="Shape 17"/>
+          <p:cNvSpPr/>
+          <p:nvPr/>
+        </p:nvSpPr>
+        <p:spPr>
+          <a:xfrm>
+            <a:off x="8407349" y="91440"/>
+            <a:ext cx="1173226" cy="274320"/>
+          </a:xfrm>
+          <a:prstGeom prst="rect">
+            <a:avLst/>
+          </a:prstGeom>
+          <a:solidFill>
+            <a:srgbClr val="FEF3C7"/>
+          </a:solidFill>
+          <a:ln w="12700">
+            <a:solidFill>
+              <a:srgbClr val="B45309"/>
+            </a:solidFill>
+            <a:prstDash val="solid"/>
+          </a:ln>
+        </p:spPr>
+      </p:sp>
+      <p:sp>
+        <p:nvSpPr>
+          <p:cNvPr id="22" name="Shape 18"/>
+          <p:cNvSpPr/>
+          <p:nvPr/>
+        </p:nvSpPr>
+        <p:spPr>
+          <a:xfrm>
+            <a:off x="8407349" y="91440"/>
+            <a:ext cx="27432" cy="274320"/>
+          </a:xfrm>
+          <a:prstGeom prst="rect">
+            <a:avLst/>
+          </a:prstGeom>
+          <a:solidFill>
+            <a:srgbClr val="B45309"/>
+          </a:solidFill>
+          <a:ln w="12700">
+            <a:solidFill>
+              <a:srgbClr val="B45309"/>
+            </a:solidFill>
+            <a:prstDash val="solid"/>
+          </a:ln>
+        </p:spPr>
+      </p:sp>
+      <p:sp>
+        <p:nvSpPr>
+          <p:cNvPr id="23" name="Shape 19"/>
+          <p:cNvSpPr/>
+          <p:nvPr/>
+        </p:nvSpPr>
+        <p:spPr>
+          <a:xfrm>
+            <a:off x="8462213" y="91440"/>
+            <a:ext cx="27432" cy="274320"/>
+          </a:xfrm>
+          <a:prstGeom prst="rect">
+            <a:avLst/>
+          </a:prstGeom>
+          <a:solidFill>
+            <a:srgbClr val="B45309"/>
+          </a:solidFill>
+          <a:ln w="12700">
+            <a:solidFill>
+              <a:srgbClr val="B45309"/>
+            </a:solidFill>
+            <a:prstDash val="solid"/>
+          </a:ln>
+        </p:spPr>
+      </p:sp>
+      <p:pic>
+        <p:nvPicPr>
+          <p:cNvPr id="24" name="Image 2" descr="preencoded.png">    </p:cNvPr>
+          <p:cNvPicPr>
+            <a:picLocks noChangeAspect="1"/>
+          </p:cNvPicPr>
+          <p:nvPr/>
+        </p:nvPicPr>
+        <p:blipFill>
+          <a:blip r:embed="rId3"/>
+          <a:stretch>
+            <a:fillRect/>
+          </a:stretch>
+        </p:blipFill>
+        <p:spPr>
+          <a:xfrm>
+            <a:off x="8535365" y="128016"/>
+            <a:ext cx="201168" cy="201168"/>
+          </a:xfrm>
+          <a:prstGeom prst="rect">
+            <a:avLst/>
+          </a:prstGeom>
+        </p:spPr>
+      </p:pic>
+      <p:sp>
+        <p:nvSpPr>
+          <p:cNvPr id="25" name="Text 20"/>
+          <p:cNvSpPr txBox="1"/>
+          <p:nvPr/>
+        </p:nvSpPr>
+        <p:spPr>
+          <a:xfrm>
+            <a:off x="8791397" y="91440"/>
+            <a:ext cx="752602" cy="274320"/>
+          </a:xfrm>
+          <a:prstGeom prst="rect">
+            <a:avLst/>
+          </a:prstGeom>
+          <a:noFill/>
+          <a:ln/>
+        </p:spPr>
+        <p:txBody>
+          <a:bodyPr wrap="square" lIns="0" tIns="0" rIns="0" bIns="0" rtlCol="0" anchor="ctr"/>
+          <a:lstStyle/>
+          <a:p>
+            <a:pPr indent="0" marL="0">
+              <a:buNone/>
+            </a:pPr>
+            <a:r>
+              <a:rPr lang="en-US" sz="1100" b="1" dirty="0">
+                <a:solidFill>
+                  <a:srgbClr val="92400E"/>
+                </a:solidFill>
+                <a:latin typeface="Calibri" pitchFamily="34" charset="0"/>
+                <a:ea typeface="Calibri" pitchFamily="34" charset="-122"/>
+                <a:cs typeface="Calibri" pitchFamily="34" charset="-120"/>
+              </a:rPr>
+              <a:t>USE NOW</a:t>
+            </a:r>
+            <a:endParaRPr lang="en-US" sz="1100" dirty="0"/>
+          </a:p>
+        </p:txBody>
+      </p:sp>
+      <p:sp>
+        <p:nvSpPr>
+          <p:cNvPr id="26" name="Shape 21"/>
+          <p:cNvSpPr/>
+          <p:nvPr/>
+        </p:nvSpPr>
+        <p:spPr>
+          <a:xfrm>
+            <a:off x="6518097" y="91440"/>
+            <a:ext cx="1779524" cy="274320"/>
+          </a:xfrm>
+          <a:prstGeom prst="rect">
+            <a:avLst/>
+          </a:prstGeom>
+          <a:solidFill>
+            <a:srgbClr val="E0F2FE"/>
+          </a:solidFill>
+          <a:ln w="12700">
+            <a:solidFill>
+              <a:srgbClr val="0369A1"/>
+            </a:solidFill>
+            <a:prstDash val="solid"/>
+          </a:ln>
+        </p:spPr>
+      </p:sp>
+      <p:sp>
+        <p:nvSpPr>
+          <p:cNvPr id="27" name="Shape 22"/>
+          <p:cNvSpPr/>
+          <p:nvPr/>
+        </p:nvSpPr>
+        <p:spPr>
+          <a:xfrm>
+            <a:off x="6518097" y="91440"/>
+            <a:ext cx="73152" cy="274320"/>
+          </a:xfrm>
+          <a:prstGeom prst="rect">
+            <a:avLst/>
+          </a:prstGeom>
+          <a:solidFill>
+            <a:srgbClr val="0369A1"/>
+          </a:solidFill>
+          <a:ln w="12700">
+            <a:solidFill>
+              <a:srgbClr val="0369A1"/>
+            </a:solidFill>
+            <a:prstDash val="solid"/>
+          </a:ln>
+        </p:spPr>
+      </p:sp>
+      <p:pic>
+        <p:nvPicPr>
+          <p:cNvPr id="28" name="Image 3" descr="preencoded.png">    </p:cNvPr>
+          <p:cNvPicPr>
+            <a:picLocks noChangeAspect="1"/>
+          </p:cNvPicPr>
+          <p:nvPr/>
+        </p:nvPicPr>
+        <p:blipFill>
+          <a:blip r:embed="rId4"/>
+          <a:stretch>
+            <a:fillRect/>
+          </a:stretch>
+        </p:blipFill>
+        <p:spPr>
+          <a:xfrm>
+            <a:off x="6646113" y="128016"/>
+            <a:ext cx="201168" cy="201168"/>
+          </a:xfrm>
+          <a:prstGeom prst="rect">
+            <a:avLst/>
+          </a:prstGeom>
+        </p:spPr>
+      </p:pic>
+      <p:sp>
+        <p:nvSpPr>
+          <p:cNvPr id="29" name="Text 23"/>
+          <p:cNvSpPr txBox="1"/>
+          <p:nvPr/>
+        </p:nvSpPr>
+        <p:spPr>
+          <a:xfrm>
+            <a:off x="6902145" y="91440"/>
+            <a:ext cx="1358900" cy="274320"/>
+          </a:xfrm>
+          <a:prstGeom prst="rect">
+            <a:avLst/>
+          </a:prstGeom>
+          <a:noFill/>
+          <a:ln/>
+        </p:spPr>
+        <p:txBody>
+          <a:bodyPr wrap="square" lIns="0" tIns="0" rIns="0" bIns="0" rtlCol="0" anchor="ctr"/>
+          <a:lstStyle/>
+          <a:p>
+            <a:pPr indent="0" marL="0">
+              <a:buNone/>
+            </a:pPr>
+            <a:r>
+              <a:rPr lang="en-US" sz="1100" b="1" dirty="0">
+                <a:solidFill>
+                  <a:srgbClr val="075985"/>
+                </a:solidFill>
+                <a:latin typeface="Calibri" pitchFamily="34" charset="0"/>
+                <a:ea typeface="Calibri" pitchFamily="34" charset="-122"/>
+                <a:cs typeface="Calibri" pitchFamily="34" charset="-120"/>
+              </a:rPr>
+              <a:t>UNDERSTAND NOW</a:t>
+            </a:r>
+            <a:endParaRPr lang="en-US" sz="1100" dirty="0"/>
+          </a:p>
+        </p:txBody>
+      </p:sp>
+      <p:sp>
+        <p:nvSpPr>
           <p:cNvPr id="25" name="Slide Number Placeholder 0"/>
           <p:cNvSpPr>
             <a:spLocks noGrp="1"/>
@@ -3995,6 +4426,133 @@
       </p:sp>
       <p:sp>
         <p:nvSpPr>
+          <p:cNvPr id="16" name="Shape 14"/>
+          <p:cNvSpPr/>
+          <p:nvPr/>
+        </p:nvSpPr>
+        <p:spPr>
+          <a:xfrm>
+            <a:off x="8156397" y="91440"/>
+            <a:ext cx="3486658" cy="274320"/>
+          </a:xfrm>
+          <a:prstGeom prst="rect">
+            <a:avLst/>
+          </a:prstGeom>
+          <a:solidFill>
+            <a:srgbClr val="E0F2FE"/>
+          </a:solidFill>
+          <a:ln w="12700">
+            <a:solidFill>
+              <a:srgbClr val="0369A1"/>
+            </a:solidFill>
+            <a:prstDash val="solid"/>
+          </a:ln>
+        </p:spPr>
+      </p:sp>
+      <p:sp>
+        <p:nvSpPr>
+          <p:cNvPr id="17" name="Shape 15"/>
+          <p:cNvSpPr/>
+          <p:nvPr/>
+        </p:nvSpPr>
+        <p:spPr>
+          <a:xfrm>
+            <a:off x="8156397" y="91440"/>
+            <a:ext cx="73152" cy="274320"/>
+          </a:xfrm>
+          <a:prstGeom prst="rect">
+            <a:avLst/>
+          </a:prstGeom>
+          <a:solidFill>
+            <a:srgbClr val="0369A1"/>
+          </a:solidFill>
+          <a:ln w="12700">
+            <a:solidFill>
+              <a:srgbClr val="0369A1"/>
+            </a:solidFill>
+            <a:prstDash val="solid"/>
+          </a:ln>
+        </p:spPr>
+      </p:sp>
+      <p:pic>
+        <p:nvPicPr>
+          <p:cNvPr id="18" name="Image 0" descr="preencoded.png">    </p:cNvPr>
+          <p:cNvPicPr>
+            <a:picLocks noChangeAspect="1"/>
+          </p:cNvPicPr>
+          <p:nvPr/>
+        </p:nvPicPr>
+        <p:blipFill>
+          <a:blip r:embed="rId1"/>
+          <a:stretch>
+            <a:fillRect/>
+          </a:stretch>
+        </p:blipFill>
+        <p:spPr>
+          <a:xfrm>
+            <a:off x="8284413" y="128016"/>
+            <a:ext cx="201168" cy="201168"/>
+          </a:xfrm>
+          <a:prstGeom prst="rect">
+            <a:avLst/>
+          </a:prstGeom>
+        </p:spPr>
+      </p:pic>
+      <p:sp>
+        <p:nvSpPr>
+          <p:cNvPr id="19" name="Text 16"/>
+          <p:cNvSpPr txBox="1"/>
+          <p:nvPr/>
+        </p:nvSpPr>
+        <p:spPr>
+          <a:xfrm>
+            <a:off x="8540445" y="91440"/>
+            <a:ext cx="3066034" cy="274320"/>
+          </a:xfrm>
+          <a:prstGeom prst="rect">
+            <a:avLst/>
+          </a:prstGeom>
+          <a:noFill/>
+          <a:ln/>
+        </p:spPr>
+        <p:txBody>
+          <a:bodyPr wrap="square" lIns="0" tIns="0" rIns="0" bIns="0" rtlCol="0" anchor="ctr"/>
+          <a:lstStyle/>
+          <a:p>
+            <a:pPr indent="0" marL="0">
+              <a:buNone/>
+            </a:pPr>
+            <a:r>
+              <a:rPr lang="en-US" sz="1100" b="1" dirty="0">
+                <a:solidFill>
+                  <a:srgbClr val="075985"/>
+                </a:solidFill>
+                <a:latin typeface="Calibri" pitchFamily="34" charset="0"/>
+                <a:ea typeface="Calibri" pitchFamily="34" charset="-122"/>
+                <a:cs typeface="Calibri" pitchFamily="34" charset="-120"/>
+              </a:rPr>
+              <a:t>UNDERSTAND NOW</a:t>
+            </a:r>
+            <a:pPr indent="0" marL="0">
+              <a:buNone/>
+            </a:pPr>
+            <a:r>
+              <a:rPr lang="en-US" sz="1100" dirty="0">
+                <a:solidFill>
+                  <a:srgbClr val="075985"/>
+                </a:solidFill>
+                <a:latin typeface="Calibri" pitchFamily="34" charset="0"/>
+                <a:ea typeface="Calibri" pitchFamily="34" charset="-122"/>
+                <a:cs typeface="Calibri" pitchFamily="34" charset="-120"/>
+              </a:rPr>
+              <a:t> · IEEE 754 floating point</a:t>
+            </a:r>
+            <a:endParaRPr lang="en-US" sz="1100" dirty="0"/>
+          </a:p>
+        </p:txBody>
+      </p:sp>
+      <p:sp>
+        <p:nvSpPr>
           <p:cNvPr id="25" name="Slide Number Placeholder 0"/>
           <p:cNvSpPr>
             <a:spLocks noGrp="1"/>
@@ -4914,6 +5472,133 @@
       </p:sp>
       <p:sp>
         <p:nvSpPr>
+          <p:cNvPr id="23" name="Shape 21"/>
+          <p:cNvSpPr/>
+          <p:nvPr/>
+        </p:nvSpPr>
+        <p:spPr>
+          <a:xfrm>
+            <a:off x="8156397" y="91440"/>
+            <a:ext cx="3486658" cy="274320"/>
+          </a:xfrm>
+          <a:prstGeom prst="rect">
+            <a:avLst/>
+          </a:prstGeom>
+          <a:solidFill>
+            <a:srgbClr val="E0F2FE"/>
+          </a:solidFill>
+          <a:ln w="12700">
+            <a:solidFill>
+              <a:srgbClr val="0369A1"/>
+            </a:solidFill>
+            <a:prstDash val="solid"/>
+          </a:ln>
+        </p:spPr>
+      </p:sp>
+      <p:sp>
+        <p:nvSpPr>
+          <p:cNvPr id="24" name="Shape 22"/>
+          <p:cNvSpPr/>
+          <p:nvPr/>
+        </p:nvSpPr>
+        <p:spPr>
+          <a:xfrm>
+            <a:off x="8156397" y="91440"/>
+            <a:ext cx="73152" cy="274320"/>
+          </a:xfrm>
+          <a:prstGeom prst="rect">
+            <a:avLst/>
+          </a:prstGeom>
+          <a:solidFill>
+            <a:srgbClr val="0369A1"/>
+          </a:solidFill>
+          <a:ln w="12700">
+            <a:solidFill>
+              <a:srgbClr val="0369A1"/>
+            </a:solidFill>
+            <a:prstDash val="solid"/>
+          </a:ln>
+        </p:spPr>
+      </p:sp>
+      <p:pic>
+        <p:nvPicPr>
+          <p:cNvPr id="25" name="Image 0" descr="preencoded.png">    </p:cNvPr>
+          <p:cNvPicPr>
+            <a:picLocks noChangeAspect="1"/>
+          </p:cNvPicPr>
+          <p:nvPr/>
+        </p:nvPicPr>
+        <p:blipFill>
+          <a:blip r:embed="rId1"/>
+          <a:stretch>
+            <a:fillRect/>
+          </a:stretch>
+        </p:blipFill>
+        <p:spPr>
+          <a:xfrm>
+            <a:off x="8284413" y="128016"/>
+            <a:ext cx="201168" cy="201168"/>
+          </a:xfrm>
+          <a:prstGeom prst="rect">
+            <a:avLst/>
+          </a:prstGeom>
+        </p:spPr>
+      </p:pic>
+      <p:sp>
+        <p:nvSpPr>
+          <p:cNvPr id="26" name="Text 23"/>
+          <p:cNvSpPr txBox="1"/>
+          <p:nvPr/>
+        </p:nvSpPr>
+        <p:spPr>
+          <a:xfrm>
+            <a:off x="8540445" y="91440"/>
+            <a:ext cx="3066034" cy="274320"/>
+          </a:xfrm>
+          <a:prstGeom prst="rect">
+            <a:avLst/>
+          </a:prstGeom>
+          <a:noFill/>
+          <a:ln/>
+        </p:spPr>
+        <p:txBody>
+          <a:bodyPr wrap="square" lIns="0" tIns="0" rIns="0" bIns="0" rtlCol="0" anchor="ctr"/>
+          <a:lstStyle/>
+          <a:p>
+            <a:pPr indent="0" marL="0">
+              <a:buNone/>
+            </a:pPr>
+            <a:r>
+              <a:rPr lang="en-US" sz="1100" b="1" dirty="0">
+                <a:solidFill>
+                  <a:srgbClr val="075985"/>
+                </a:solidFill>
+                <a:latin typeface="Calibri" pitchFamily="34" charset="0"/>
+                <a:ea typeface="Calibri" pitchFamily="34" charset="-122"/>
+                <a:cs typeface="Calibri" pitchFamily="34" charset="-120"/>
+              </a:rPr>
+              <a:t>UNDERSTAND NOW</a:t>
+            </a:r>
+            <a:pPr indent="0" marL="0">
+              <a:buNone/>
+            </a:pPr>
+            <a:r>
+              <a:rPr lang="en-US" sz="1100" dirty="0">
+                <a:solidFill>
+                  <a:srgbClr val="075985"/>
+                </a:solidFill>
+                <a:latin typeface="Calibri" pitchFamily="34" charset="0"/>
+                <a:ea typeface="Calibri" pitchFamily="34" charset="-122"/>
+                <a:cs typeface="Calibri" pitchFamily="34" charset="-120"/>
+              </a:rPr>
+              <a:t> · IEEE 754 floating point</a:t>
+            </a:r>
+            <a:endParaRPr lang="en-US" sz="1100" dirty="0"/>
+          </a:p>
+        </p:txBody>
+      </p:sp>
+      <p:sp>
+        <p:nvSpPr>
           <p:cNvPr id="25" name="Slide Number Placeholder 0"/>
           <p:cNvSpPr>
             <a:spLocks noGrp="1"/>
@@ -5748,6 +6433,133 @@
               <a:t>1100 0000 1010 0100 0000 0000 0000 0000  =  0xC0A40000</a:t>
             </a:r>
             <a:endParaRPr lang="en-US" sz="2100" dirty="0"/>
+          </a:p>
+        </p:txBody>
+      </p:sp>
+      <p:sp>
+        <p:nvSpPr>
+          <p:cNvPr id="20" name="Shape 18"/>
+          <p:cNvSpPr/>
+          <p:nvPr/>
+        </p:nvSpPr>
+        <p:spPr>
+          <a:xfrm>
+            <a:off x="8156397" y="91440"/>
+            <a:ext cx="3486658" cy="274320"/>
+          </a:xfrm>
+          <a:prstGeom prst="rect">
+            <a:avLst/>
+          </a:prstGeom>
+          <a:solidFill>
+            <a:srgbClr val="E0F2FE"/>
+          </a:solidFill>
+          <a:ln w="12700">
+            <a:solidFill>
+              <a:srgbClr val="0369A1"/>
+            </a:solidFill>
+            <a:prstDash val="solid"/>
+          </a:ln>
+        </p:spPr>
+      </p:sp>
+      <p:sp>
+        <p:nvSpPr>
+          <p:cNvPr id="21" name="Shape 19"/>
+          <p:cNvSpPr/>
+          <p:nvPr/>
+        </p:nvSpPr>
+        <p:spPr>
+          <a:xfrm>
+            <a:off x="8156397" y="91440"/>
+            <a:ext cx="73152" cy="274320"/>
+          </a:xfrm>
+          <a:prstGeom prst="rect">
+            <a:avLst/>
+          </a:prstGeom>
+          <a:solidFill>
+            <a:srgbClr val="0369A1"/>
+          </a:solidFill>
+          <a:ln w="12700">
+            <a:solidFill>
+              <a:srgbClr val="0369A1"/>
+            </a:solidFill>
+            <a:prstDash val="solid"/>
+          </a:ln>
+        </p:spPr>
+      </p:sp>
+      <p:pic>
+        <p:nvPicPr>
+          <p:cNvPr id="22" name="Image 0" descr="preencoded.png">    </p:cNvPr>
+          <p:cNvPicPr>
+            <a:picLocks noChangeAspect="1"/>
+          </p:cNvPicPr>
+          <p:nvPr/>
+        </p:nvPicPr>
+        <p:blipFill>
+          <a:blip r:embed="rId1"/>
+          <a:stretch>
+            <a:fillRect/>
+          </a:stretch>
+        </p:blipFill>
+        <p:spPr>
+          <a:xfrm>
+            <a:off x="8284413" y="128016"/>
+            <a:ext cx="201168" cy="201168"/>
+          </a:xfrm>
+          <a:prstGeom prst="rect">
+            <a:avLst/>
+          </a:prstGeom>
+        </p:spPr>
+      </p:pic>
+      <p:sp>
+        <p:nvSpPr>
+          <p:cNvPr id="23" name="Text 20"/>
+          <p:cNvSpPr txBox="1"/>
+          <p:nvPr/>
+        </p:nvSpPr>
+        <p:spPr>
+          <a:xfrm>
+            <a:off x="8540445" y="91440"/>
+            <a:ext cx="3066034" cy="274320"/>
+          </a:xfrm>
+          <a:prstGeom prst="rect">
+            <a:avLst/>
+          </a:prstGeom>
+          <a:noFill/>
+          <a:ln/>
+        </p:spPr>
+        <p:txBody>
+          <a:bodyPr wrap="square" lIns="0" tIns="0" rIns="0" bIns="0" rtlCol="0" anchor="ctr"/>
+          <a:lstStyle/>
+          <a:p>
+            <a:pPr indent="0" marL="0">
+              <a:buNone/>
+            </a:pPr>
+            <a:r>
+              <a:rPr lang="en-US" sz="1100" b="1" dirty="0">
+                <a:solidFill>
+                  <a:srgbClr val="075985"/>
+                </a:solidFill>
+                <a:latin typeface="Calibri" pitchFamily="34" charset="0"/>
+                <a:ea typeface="Calibri" pitchFamily="34" charset="-122"/>
+                <a:cs typeface="Calibri" pitchFamily="34" charset="-120"/>
+              </a:rPr>
+              <a:t>UNDERSTAND NOW</a:t>
+            </a:r>
+            <a:pPr indent="0" marL="0">
+              <a:buNone/>
+            </a:pPr>
+            <a:r>
+              <a:rPr lang="en-US" sz="1100" dirty="0">
+                <a:solidFill>
+                  <a:srgbClr val="075985"/>
+                </a:solidFill>
+                <a:latin typeface="Calibri" pitchFamily="34" charset="0"/>
+                <a:ea typeface="Calibri" pitchFamily="34" charset="-122"/>
+                <a:cs typeface="Calibri" pitchFamily="34" charset="-120"/>
+              </a:rPr>
+              <a:t> · IEEE 754 floating point</a:t>
+            </a:r>
+            <a:endParaRPr lang="en-US" sz="1100" dirty="0"/>
           </a:p>
         </p:txBody>
       </p:sp>
@@ -8151,6 +8963,133 @@
           </a:graphicData>
         </a:graphic>
       </p:graphicFrame>
+      <p:sp>
+        <p:nvSpPr>
+          <p:cNvPr id="4" name="Shape 1"/>
+          <p:cNvSpPr/>
+          <p:nvPr/>
+        </p:nvSpPr>
+        <p:spPr>
+          <a:xfrm>
+            <a:off x="8156397" y="91440"/>
+            <a:ext cx="3486658" cy="274320"/>
+          </a:xfrm>
+          <a:prstGeom prst="rect">
+            <a:avLst/>
+          </a:prstGeom>
+          <a:solidFill>
+            <a:srgbClr val="E0F2FE"/>
+          </a:solidFill>
+          <a:ln w="12700">
+            <a:solidFill>
+              <a:srgbClr val="0369A1"/>
+            </a:solidFill>
+            <a:prstDash val="solid"/>
+          </a:ln>
+        </p:spPr>
+      </p:sp>
+      <p:sp>
+        <p:nvSpPr>
+          <p:cNvPr id="5" name="Shape 2"/>
+          <p:cNvSpPr/>
+          <p:nvPr/>
+        </p:nvSpPr>
+        <p:spPr>
+          <a:xfrm>
+            <a:off x="8156397" y="91440"/>
+            <a:ext cx="73152" cy="274320"/>
+          </a:xfrm>
+          <a:prstGeom prst="rect">
+            <a:avLst/>
+          </a:prstGeom>
+          <a:solidFill>
+            <a:srgbClr val="0369A1"/>
+          </a:solidFill>
+          <a:ln w="12700">
+            <a:solidFill>
+              <a:srgbClr val="0369A1"/>
+            </a:solidFill>
+            <a:prstDash val="solid"/>
+          </a:ln>
+        </p:spPr>
+      </p:sp>
+      <p:pic>
+        <p:nvPicPr>
+          <p:cNvPr id="6" name="Image 0" descr="preencoded.png">    </p:cNvPr>
+          <p:cNvPicPr>
+            <a:picLocks noChangeAspect="1"/>
+          </p:cNvPicPr>
+          <p:nvPr/>
+        </p:nvPicPr>
+        <p:blipFill>
+          <a:blip r:embed="rId1"/>
+          <a:stretch>
+            <a:fillRect/>
+          </a:stretch>
+        </p:blipFill>
+        <p:spPr>
+          <a:xfrm>
+            <a:off x="8284413" y="128016"/>
+            <a:ext cx="201168" cy="201168"/>
+          </a:xfrm>
+          <a:prstGeom prst="rect">
+            <a:avLst/>
+          </a:prstGeom>
+        </p:spPr>
+      </p:pic>
+      <p:sp>
+        <p:nvSpPr>
+          <p:cNvPr id="7" name="Text 3"/>
+          <p:cNvSpPr txBox="1"/>
+          <p:nvPr/>
+        </p:nvSpPr>
+        <p:spPr>
+          <a:xfrm>
+            <a:off x="8540445" y="91440"/>
+            <a:ext cx="3066034" cy="274320"/>
+          </a:xfrm>
+          <a:prstGeom prst="rect">
+            <a:avLst/>
+          </a:prstGeom>
+          <a:noFill/>
+          <a:ln/>
+        </p:spPr>
+        <p:txBody>
+          <a:bodyPr wrap="square" lIns="0" tIns="0" rIns="0" bIns="0" rtlCol="0" anchor="ctr"/>
+          <a:lstStyle/>
+          <a:p>
+            <a:pPr indent="0" marL="0">
+              <a:buNone/>
+            </a:pPr>
+            <a:r>
+              <a:rPr lang="en-US" sz="1100" b="1" dirty="0">
+                <a:solidFill>
+                  <a:srgbClr val="075985"/>
+                </a:solidFill>
+                <a:latin typeface="Calibri" pitchFamily="34" charset="0"/>
+                <a:ea typeface="Calibri" pitchFamily="34" charset="-122"/>
+                <a:cs typeface="Calibri" pitchFamily="34" charset="-120"/>
+              </a:rPr>
+              <a:t>UNDERSTAND NOW</a:t>
+            </a:r>
+            <a:pPr indent="0" marL="0">
+              <a:buNone/>
+            </a:pPr>
+            <a:r>
+              <a:rPr lang="en-US" sz="1100" dirty="0">
+                <a:solidFill>
+                  <a:srgbClr val="075985"/>
+                </a:solidFill>
+                <a:latin typeface="Calibri" pitchFamily="34" charset="0"/>
+                <a:ea typeface="Calibri" pitchFamily="34" charset="-122"/>
+                <a:cs typeface="Calibri" pitchFamily="34" charset="-120"/>
+              </a:rPr>
+              <a:t> · IEEE 754 floating point</a:t>
+            </a:r>
+            <a:endParaRPr lang="en-US" sz="1100" dirty="0"/>
+          </a:p>
+        </p:txBody>
+      </p:sp>
       <p:sp>
         <p:nvSpPr>
           <p:cNvPr id="25" name="Slide Number Placeholder 0"/>
@@ -10350,6 +11289,133 @@
           </a:graphicData>
         </a:graphic>
       </p:graphicFrame>
+      <p:sp>
+        <p:nvSpPr>
+          <p:cNvPr id="4" name="Shape 1"/>
+          <p:cNvSpPr/>
+          <p:nvPr/>
+        </p:nvSpPr>
+        <p:spPr>
+          <a:xfrm>
+            <a:off x="8156397" y="91440"/>
+            <a:ext cx="3486658" cy="274320"/>
+          </a:xfrm>
+          <a:prstGeom prst="rect">
+            <a:avLst/>
+          </a:prstGeom>
+          <a:solidFill>
+            <a:srgbClr val="E0F2FE"/>
+          </a:solidFill>
+          <a:ln w="12700">
+            <a:solidFill>
+              <a:srgbClr val="0369A1"/>
+            </a:solidFill>
+            <a:prstDash val="solid"/>
+          </a:ln>
+        </p:spPr>
+      </p:sp>
+      <p:sp>
+        <p:nvSpPr>
+          <p:cNvPr id="5" name="Shape 2"/>
+          <p:cNvSpPr/>
+          <p:nvPr/>
+        </p:nvSpPr>
+        <p:spPr>
+          <a:xfrm>
+            <a:off x="8156397" y="91440"/>
+            <a:ext cx="73152" cy="274320"/>
+          </a:xfrm>
+          <a:prstGeom prst="rect">
+            <a:avLst/>
+          </a:prstGeom>
+          <a:solidFill>
+            <a:srgbClr val="0369A1"/>
+          </a:solidFill>
+          <a:ln w="12700">
+            <a:solidFill>
+              <a:srgbClr val="0369A1"/>
+            </a:solidFill>
+            <a:prstDash val="solid"/>
+          </a:ln>
+        </p:spPr>
+      </p:sp>
+      <p:pic>
+        <p:nvPicPr>
+          <p:cNvPr id="6" name="Image 0" descr="preencoded.png">    </p:cNvPr>
+          <p:cNvPicPr>
+            <a:picLocks noChangeAspect="1"/>
+          </p:cNvPicPr>
+          <p:nvPr/>
+        </p:nvPicPr>
+        <p:blipFill>
+          <a:blip r:embed="rId1"/>
+          <a:stretch>
+            <a:fillRect/>
+          </a:stretch>
+        </p:blipFill>
+        <p:spPr>
+          <a:xfrm>
+            <a:off x="8284413" y="128016"/>
+            <a:ext cx="201168" cy="201168"/>
+          </a:xfrm>
+          <a:prstGeom prst="rect">
+            <a:avLst/>
+          </a:prstGeom>
+        </p:spPr>
+      </p:pic>
+      <p:sp>
+        <p:nvSpPr>
+          <p:cNvPr id="7" name="Text 3"/>
+          <p:cNvSpPr txBox="1"/>
+          <p:nvPr/>
+        </p:nvSpPr>
+        <p:spPr>
+          <a:xfrm>
+            <a:off x="8540445" y="91440"/>
+            <a:ext cx="3066034" cy="274320"/>
+          </a:xfrm>
+          <a:prstGeom prst="rect">
+            <a:avLst/>
+          </a:prstGeom>
+          <a:noFill/>
+          <a:ln/>
+        </p:spPr>
+        <p:txBody>
+          <a:bodyPr wrap="square" lIns="0" tIns="0" rIns="0" bIns="0" rtlCol="0" anchor="ctr"/>
+          <a:lstStyle/>
+          <a:p>
+            <a:pPr indent="0" marL="0">
+              <a:buNone/>
+            </a:pPr>
+            <a:r>
+              <a:rPr lang="en-US" sz="1100" b="1" dirty="0">
+                <a:solidFill>
+                  <a:srgbClr val="075985"/>
+                </a:solidFill>
+                <a:latin typeface="Calibri" pitchFamily="34" charset="0"/>
+                <a:ea typeface="Calibri" pitchFamily="34" charset="-122"/>
+                <a:cs typeface="Calibri" pitchFamily="34" charset="-120"/>
+              </a:rPr>
+              <a:t>UNDERSTAND NOW</a:t>
+            </a:r>
+            <a:pPr indent="0" marL="0">
+              <a:buNone/>
+            </a:pPr>
+            <a:r>
+              <a:rPr lang="en-US" sz="1100" dirty="0">
+                <a:solidFill>
+                  <a:srgbClr val="075985"/>
+                </a:solidFill>
+                <a:latin typeface="Calibri" pitchFamily="34" charset="0"/>
+                <a:ea typeface="Calibri" pitchFamily="34" charset="-122"/>
+                <a:cs typeface="Calibri" pitchFamily="34" charset="-120"/>
+              </a:rPr>
+              <a:t> · IEEE 754 floating point</a:t>
+            </a:r>
+            <a:endParaRPr lang="en-US" sz="1100" dirty="0"/>
+          </a:p>
+        </p:txBody>
+      </p:sp>
       <p:sp>
         <p:nvSpPr>
           <p:cNvPr id="25" name="Slide Number Placeholder 0"/>
@@ -10826,6 +11892,133 @@
       </p:sp>
       <p:sp>
         <p:nvSpPr>
+          <p:cNvPr id="9" name="Shape 7"/>
+          <p:cNvSpPr/>
+          <p:nvPr/>
+        </p:nvSpPr>
+        <p:spPr>
+          <a:xfrm>
+            <a:off x="8156397" y="91440"/>
+            <a:ext cx="3486658" cy="274320"/>
+          </a:xfrm>
+          <a:prstGeom prst="rect">
+            <a:avLst/>
+          </a:prstGeom>
+          <a:solidFill>
+            <a:srgbClr val="E0F2FE"/>
+          </a:solidFill>
+          <a:ln w="12700">
+            <a:solidFill>
+              <a:srgbClr val="0369A1"/>
+            </a:solidFill>
+            <a:prstDash val="solid"/>
+          </a:ln>
+        </p:spPr>
+      </p:sp>
+      <p:sp>
+        <p:nvSpPr>
+          <p:cNvPr id="10" name="Shape 8"/>
+          <p:cNvSpPr/>
+          <p:nvPr/>
+        </p:nvSpPr>
+        <p:spPr>
+          <a:xfrm>
+            <a:off x="8156397" y="91440"/>
+            <a:ext cx="73152" cy="274320"/>
+          </a:xfrm>
+          <a:prstGeom prst="rect">
+            <a:avLst/>
+          </a:prstGeom>
+          <a:solidFill>
+            <a:srgbClr val="0369A1"/>
+          </a:solidFill>
+          <a:ln w="12700">
+            <a:solidFill>
+              <a:srgbClr val="0369A1"/>
+            </a:solidFill>
+            <a:prstDash val="solid"/>
+          </a:ln>
+        </p:spPr>
+      </p:sp>
+      <p:pic>
+        <p:nvPicPr>
+          <p:cNvPr id="11" name="Image 0" descr="preencoded.png">    </p:cNvPr>
+          <p:cNvPicPr>
+            <a:picLocks noChangeAspect="1"/>
+          </p:cNvPicPr>
+          <p:nvPr/>
+        </p:nvPicPr>
+        <p:blipFill>
+          <a:blip r:embed="rId1"/>
+          <a:stretch>
+            <a:fillRect/>
+          </a:stretch>
+        </p:blipFill>
+        <p:spPr>
+          <a:xfrm>
+            <a:off x="8284413" y="128016"/>
+            <a:ext cx="201168" cy="201168"/>
+          </a:xfrm>
+          <a:prstGeom prst="rect">
+            <a:avLst/>
+          </a:prstGeom>
+        </p:spPr>
+      </p:pic>
+      <p:sp>
+        <p:nvSpPr>
+          <p:cNvPr id="12" name="Text 9"/>
+          <p:cNvSpPr txBox="1"/>
+          <p:nvPr/>
+        </p:nvSpPr>
+        <p:spPr>
+          <a:xfrm>
+            <a:off x="8540445" y="91440"/>
+            <a:ext cx="3066034" cy="274320"/>
+          </a:xfrm>
+          <a:prstGeom prst="rect">
+            <a:avLst/>
+          </a:prstGeom>
+          <a:noFill/>
+          <a:ln/>
+        </p:spPr>
+        <p:txBody>
+          <a:bodyPr wrap="square" lIns="0" tIns="0" rIns="0" bIns="0" rtlCol="0" anchor="ctr"/>
+          <a:lstStyle/>
+          <a:p>
+            <a:pPr indent="0" marL="0">
+              <a:buNone/>
+            </a:pPr>
+            <a:r>
+              <a:rPr lang="en-US" sz="1100" b="1" dirty="0">
+                <a:solidFill>
+                  <a:srgbClr val="075985"/>
+                </a:solidFill>
+                <a:latin typeface="Calibri" pitchFamily="34" charset="0"/>
+                <a:ea typeface="Calibri" pitchFamily="34" charset="-122"/>
+                <a:cs typeface="Calibri" pitchFamily="34" charset="-120"/>
+              </a:rPr>
+              <a:t>UNDERSTAND NOW</a:t>
+            </a:r>
+            <a:pPr indent="0" marL="0">
+              <a:buNone/>
+            </a:pPr>
+            <a:r>
+              <a:rPr lang="en-US" sz="1100" dirty="0">
+                <a:solidFill>
+                  <a:srgbClr val="075985"/>
+                </a:solidFill>
+                <a:latin typeface="Calibri" pitchFamily="34" charset="0"/>
+                <a:ea typeface="Calibri" pitchFamily="34" charset="-122"/>
+                <a:cs typeface="Calibri" pitchFamily="34" charset="-120"/>
+              </a:rPr>
+              <a:t> · IEEE 754 floating point</a:t>
+            </a:r>
+            <a:endParaRPr lang="en-US" sz="1100" dirty="0"/>
+          </a:p>
+        </p:txBody>
+      </p:sp>
+      <p:sp>
+        <p:nvSpPr>
           <p:cNvPr id="25" name="Slide Number Placeholder 0"/>
           <p:cNvSpPr>
             <a:spLocks noGrp="1"/>
@@ -12888,6 +14081,133 @@
           </a:graphicData>
         </a:graphic>
       </p:graphicFrame>
+      <p:sp>
+        <p:nvSpPr>
+          <p:cNvPr id="4" name="Shape 1"/>
+          <p:cNvSpPr/>
+          <p:nvPr/>
+        </p:nvSpPr>
+        <p:spPr>
+          <a:xfrm>
+            <a:off x="8550351" y="91440"/>
+            <a:ext cx="3092704" cy="274320"/>
+          </a:xfrm>
+          <a:prstGeom prst="rect">
+            <a:avLst/>
+          </a:prstGeom>
+          <a:solidFill>
+            <a:srgbClr val="E0F2FE"/>
+          </a:solidFill>
+          <a:ln w="12700">
+            <a:solidFill>
+              <a:srgbClr val="0369A1"/>
+            </a:solidFill>
+            <a:prstDash val="solid"/>
+          </a:ln>
+        </p:spPr>
+      </p:sp>
+      <p:sp>
+        <p:nvSpPr>
+          <p:cNvPr id="5" name="Shape 2"/>
+          <p:cNvSpPr/>
+          <p:nvPr/>
+        </p:nvSpPr>
+        <p:spPr>
+          <a:xfrm>
+            <a:off x="8550351" y="91440"/>
+            <a:ext cx="73152" cy="274320"/>
+          </a:xfrm>
+          <a:prstGeom prst="rect">
+            <a:avLst/>
+          </a:prstGeom>
+          <a:solidFill>
+            <a:srgbClr val="0369A1"/>
+          </a:solidFill>
+          <a:ln w="12700">
+            <a:solidFill>
+              <a:srgbClr val="0369A1"/>
+            </a:solidFill>
+            <a:prstDash val="solid"/>
+          </a:ln>
+        </p:spPr>
+      </p:sp>
+      <p:pic>
+        <p:nvPicPr>
+          <p:cNvPr id="6" name="Image 0" descr="preencoded.png">    </p:cNvPr>
+          <p:cNvPicPr>
+            <a:picLocks noChangeAspect="1"/>
+          </p:cNvPicPr>
+          <p:nvPr/>
+        </p:nvPicPr>
+        <p:blipFill>
+          <a:blip r:embed="rId1"/>
+          <a:stretch>
+            <a:fillRect/>
+          </a:stretch>
+        </p:blipFill>
+        <p:spPr>
+          <a:xfrm>
+            <a:off x="8678367" y="128016"/>
+            <a:ext cx="201168" cy="201168"/>
+          </a:xfrm>
+          <a:prstGeom prst="rect">
+            <a:avLst/>
+          </a:prstGeom>
+        </p:spPr>
+      </p:pic>
+      <p:sp>
+        <p:nvSpPr>
+          <p:cNvPr id="7" name="Text 3"/>
+          <p:cNvSpPr txBox="1"/>
+          <p:nvPr/>
+        </p:nvSpPr>
+        <p:spPr>
+          <a:xfrm>
+            <a:off x="8934399" y="91440"/>
+            <a:ext cx="2672080" cy="274320"/>
+          </a:xfrm>
+          <a:prstGeom prst="rect">
+            <a:avLst/>
+          </a:prstGeom>
+          <a:noFill/>
+          <a:ln/>
+        </p:spPr>
+        <p:txBody>
+          <a:bodyPr wrap="square" lIns="0" tIns="0" rIns="0" bIns="0" rtlCol="0" anchor="ctr"/>
+          <a:lstStyle/>
+          <a:p>
+            <a:pPr indent="0" marL="0">
+              <a:buNone/>
+            </a:pPr>
+            <a:r>
+              <a:rPr lang="en-US" sz="1100" b="1" dirty="0">
+                <a:solidFill>
+                  <a:srgbClr val="075985"/>
+                </a:solidFill>
+                <a:latin typeface="Calibri" pitchFamily="34" charset="0"/>
+                <a:ea typeface="Calibri" pitchFamily="34" charset="-122"/>
+                <a:cs typeface="Calibri" pitchFamily="34" charset="-120"/>
+              </a:rPr>
+              <a:t>UNDERSTAND NOW</a:t>
+            </a:r>
+            <a:pPr indent="0" marL="0">
+              <a:buNone/>
+            </a:pPr>
+            <a:r>
+              <a:rPr lang="en-US" sz="1100" dirty="0">
+                <a:solidFill>
+                  <a:srgbClr val="075985"/>
+                </a:solidFill>
+                <a:latin typeface="Calibri" pitchFamily="34" charset="0"/>
+                <a:ea typeface="Calibri" pitchFamily="34" charset="-122"/>
+                <a:cs typeface="Calibri" pitchFamily="34" charset="-120"/>
+              </a:rPr>
+              <a:t> · the name RV32IMAC</a:t>
+            </a:r>
+            <a:endParaRPr lang="en-US" sz="1100" dirty="0"/>
+          </a:p>
+        </p:txBody>
+      </p:sp>
       <p:sp>
         <p:nvSpPr>
           <p:cNvPr id="25" name="Slide Number Placeholder 0"/>
@@ -19132,6 +20452,133 @@
       </p:sp>
       <p:sp>
         <p:nvSpPr>
+          <p:cNvPr id="16" name="Shape 14"/>
+          <p:cNvSpPr/>
+          <p:nvPr/>
+        </p:nvSpPr>
+        <p:spPr>
+          <a:xfrm>
+            <a:off x="7762443" y="91440"/>
+            <a:ext cx="3880612" cy="274320"/>
+          </a:xfrm>
+          <a:prstGeom prst="rect">
+            <a:avLst/>
+          </a:prstGeom>
+          <a:solidFill>
+            <a:srgbClr val="E0F2FE"/>
+          </a:solidFill>
+          <a:ln w="12700">
+            <a:solidFill>
+              <a:srgbClr val="0369A1"/>
+            </a:solidFill>
+            <a:prstDash val="solid"/>
+          </a:ln>
+        </p:spPr>
+      </p:sp>
+      <p:sp>
+        <p:nvSpPr>
+          <p:cNvPr id="17" name="Shape 15"/>
+          <p:cNvSpPr/>
+          <p:nvPr/>
+        </p:nvSpPr>
+        <p:spPr>
+          <a:xfrm>
+            <a:off x="7762443" y="91440"/>
+            <a:ext cx="73152" cy="274320"/>
+          </a:xfrm>
+          <a:prstGeom prst="rect">
+            <a:avLst/>
+          </a:prstGeom>
+          <a:solidFill>
+            <a:srgbClr val="0369A1"/>
+          </a:solidFill>
+          <a:ln w="12700">
+            <a:solidFill>
+              <a:srgbClr val="0369A1"/>
+            </a:solidFill>
+            <a:prstDash val="solid"/>
+          </a:ln>
+        </p:spPr>
+      </p:sp>
+      <p:pic>
+        <p:nvPicPr>
+          <p:cNvPr id="18" name="Image 0" descr="preencoded.png">    </p:cNvPr>
+          <p:cNvPicPr>
+            <a:picLocks noChangeAspect="1"/>
+          </p:cNvPicPr>
+          <p:nvPr/>
+        </p:nvPicPr>
+        <p:blipFill>
+          <a:blip r:embed="rId1"/>
+          <a:stretch>
+            <a:fillRect/>
+          </a:stretch>
+        </p:blipFill>
+        <p:spPr>
+          <a:xfrm>
+            <a:off x="7890459" y="128016"/>
+            <a:ext cx="201168" cy="201168"/>
+          </a:xfrm>
+          <a:prstGeom prst="rect">
+            <a:avLst/>
+          </a:prstGeom>
+        </p:spPr>
+      </p:pic>
+      <p:sp>
+        <p:nvSpPr>
+          <p:cNvPr id="19" name="Text 16"/>
+          <p:cNvSpPr txBox="1"/>
+          <p:nvPr/>
+        </p:nvSpPr>
+        <p:spPr>
+          <a:xfrm>
+            <a:off x="8146491" y="91440"/>
+            <a:ext cx="3459988" cy="274320"/>
+          </a:xfrm>
+          <a:prstGeom prst="rect">
+            <a:avLst/>
+          </a:prstGeom>
+          <a:noFill/>
+          <a:ln/>
+        </p:spPr>
+        <p:txBody>
+          <a:bodyPr wrap="square" lIns="0" tIns="0" rIns="0" bIns="0" rtlCol="0" anchor="ctr"/>
+          <a:lstStyle/>
+          <a:p>
+            <a:pPr indent="0" marL="0">
+              <a:buNone/>
+            </a:pPr>
+            <a:r>
+              <a:rPr lang="en-US" sz="1100" b="1" dirty="0">
+                <a:solidFill>
+                  <a:srgbClr val="075985"/>
+                </a:solidFill>
+                <a:latin typeface="Calibri" pitchFamily="34" charset="0"/>
+                <a:ea typeface="Calibri" pitchFamily="34" charset="-122"/>
+                <a:cs typeface="Calibri" pitchFamily="34" charset="-120"/>
+              </a:rPr>
+              <a:t>UNDERSTAND NOW</a:t>
+            </a:r>
+            <a:pPr indent="0" marL="0">
+              <a:buNone/>
+            </a:pPr>
+            <a:r>
+              <a:rPr lang="en-US" sz="1100" dirty="0">
+                <a:solidFill>
+                  <a:srgbClr val="075985"/>
+                </a:solidFill>
+                <a:latin typeface="Calibri" pitchFamily="34" charset="0"/>
+                <a:ea typeface="Calibri" pitchFamily="34" charset="-122"/>
+                <a:cs typeface="Calibri" pitchFamily="34" charset="-120"/>
+              </a:rPr>
+              <a:t> · one's complement and excess-k</a:t>
+            </a:r>
+            <a:endParaRPr lang="en-US" sz="1100" dirty="0"/>
+          </a:p>
+        </p:txBody>
+      </p:sp>
+      <p:sp>
+        <p:nvSpPr>
           <p:cNvPr id="25" name="Slide Number Placeholder 0"/>
           <p:cNvSpPr>
             <a:spLocks noGrp="1"/>
@@ -20246,6 +21693,133 @@
       </p:sp>
       <p:sp>
         <p:nvSpPr>
+          <p:cNvPr id="24" name="Shape 22"/>
+          <p:cNvSpPr/>
+          <p:nvPr/>
+        </p:nvSpPr>
+        <p:spPr>
+          <a:xfrm>
+            <a:off x="7762443" y="91440"/>
+            <a:ext cx="3880612" cy="274320"/>
+          </a:xfrm>
+          <a:prstGeom prst="rect">
+            <a:avLst/>
+          </a:prstGeom>
+          <a:solidFill>
+            <a:srgbClr val="E0F2FE"/>
+          </a:solidFill>
+          <a:ln w="12700">
+            <a:solidFill>
+              <a:srgbClr val="0369A1"/>
+            </a:solidFill>
+            <a:prstDash val="solid"/>
+          </a:ln>
+        </p:spPr>
+      </p:sp>
+      <p:sp>
+        <p:nvSpPr>
+          <p:cNvPr id="25" name="Shape 23"/>
+          <p:cNvSpPr/>
+          <p:nvPr/>
+        </p:nvSpPr>
+        <p:spPr>
+          <a:xfrm>
+            <a:off x="7762443" y="91440"/>
+            <a:ext cx="73152" cy="274320"/>
+          </a:xfrm>
+          <a:prstGeom prst="rect">
+            <a:avLst/>
+          </a:prstGeom>
+          <a:solidFill>
+            <a:srgbClr val="0369A1"/>
+          </a:solidFill>
+          <a:ln w="12700">
+            <a:solidFill>
+              <a:srgbClr val="0369A1"/>
+            </a:solidFill>
+            <a:prstDash val="solid"/>
+          </a:ln>
+        </p:spPr>
+      </p:sp>
+      <p:pic>
+        <p:nvPicPr>
+          <p:cNvPr id="26" name="Image 0" descr="preencoded.png">    </p:cNvPr>
+          <p:cNvPicPr>
+            <a:picLocks noChangeAspect="1"/>
+          </p:cNvPicPr>
+          <p:nvPr/>
+        </p:nvPicPr>
+        <p:blipFill>
+          <a:blip r:embed="rId1"/>
+          <a:stretch>
+            <a:fillRect/>
+          </a:stretch>
+        </p:blipFill>
+        <p:spPr>
+          <a:xfrm>
+            <a:off x="7890459" y="128016"/>
+            <a:ext cx="201168" cy="201168"/>
+          </a:xfrm>
+          <a:prstGeom prst="rect">
+            <a:avLst/>
+          </a:prstGeom>
+        </p:spPr>
+      </p:pic>
+      <p:sp>
+        <p:nvSpPr>
+          <p:cNvPr id="27" name="Text 24"/>
+          <p:cNvSpPr txBox="1"/>
+          <p:nvPr/>
+        </p:nvSpPr>
+        <p:spPr>
+          <a:xfrm>
+            <a:off x="8146491" y="91440"/>
+            <a:ext cx="3459988" cy="274320"/>
+          </a:xfrm>
+          <a:prstGeom prst="rect">
+            <a:avLst/>
+          </a:prstGeom>
+          <a:noFill/>
+          <a:ln/>
+        </p:spPr>
+        <p:txBody>
+          <a:bodyPr wrap="square" lIns="0" tIns="0" rIns="0" bIns="0" rtlCol="0" anchor="ctr"/>
+          <a:lstStyle/>
+          <a:p>
+            <a:pPr indent="0" marL="0">
+              <a:buNone/>
+            </a:pPr>
+            <a:r>
+              <a:rPr lang="en-US" sz="1100" b="1" dirty="0">
+                <a:solidFill>
+                  <a:srgbClr val="075985"/>
+                </a:solidFill>
+                <a:latin typeface="Calibri" pitchFamily="34" charset="0"/>
+                <a:ea typeface="Calibri" pitchFamily="34" charset="-122"/>
+                <a:cs typeface="Calibri" pitchFamily="34" charset="-120"/>
+              </a:rPr>
+              <a:t>UNDERSTAND NOW</a:t>
+            </a:r>
+            <a:pPr indent="0" marL="0">
+              <a:buNone/>
+            </a:pPr>
+            <a:r>
+              <a:rPr lang="en-US" sz="1100" dirty="0">
+                <a:solidFill>
+                  <a:srgbClr val="075985"/>
+                </a:solidFill>
+                <a:latin typeface="Calibri" pitchFamily="34" charset="0"/>
+                <a:ea typeface="Calibri" pitchFamily="34" charset="-122"/>
+                <a:cs typeface="Calibri" pitchFamily="34" charset="-120"/>
+              </a:rPr>
+              <a:t> · one's complement and excess-k</a:t>
+            </a:r>
+            <a:endParaRPr lang="en-US" sz="1100" dirty="0"/>
+          </a:p>
+        </p:txBody>
+      </p:sp>
+      <p:sp>
+        <p:nvSpPr>
           <p:cNvPr id="25" name="Slide Number Placeholder 0"/>
           <p:cNvSpPr>
             <a:spLocks noGrp="1"/>
@@ -20795,6 +22369,133 @@
               <a:t>on four bits with k = 8: the pattern 0000 means -8, 1000 means 0, 1111 means +7</a:t>
             </a:r>
             <a:endParaRPr lang="en-US" sz="1900" dirty="0"/>
+          </a:p>
+        </p:txBody>
+      </p:sp>
+      <p:sp>
+        <p:nvSpPr>
+          <p:cNvPr id="16" name="Shape 14"/>
+          <p:cNvSpPr/>
+          <p:nvPr/>
+        </p:nvSpPr>
+        <p:spPr>
+          <a:xfrm>
+            <a:off x="7762443" y="91440"/>
+            <a:ext cx="3880612" cy="274320"/>
+          </a:xfrm>
+          <a:prstGeom prst="rect">
+            <a:avLst/>
+          </a:prstGeom>
+          <a:solidFill>
+            <a:srgbClr val="E0F2FE"/>
+          </a:solidFill>
+          <a:ln w="12700">
+            <a:solidFill>
+              <a:srgbClr val="0369A1"/>
+            </a:solidFill>
+            <a:prstDash val="solid"/>
+          </a:ln>
+        </p:spPr>
+      </p:sp>
+      <p:sp>
+        <p:nvSpPr>
+          <p:cNvPr id="17" name="Shape 15"/>
+          <p:cNvSpPr/>
+          <p:nvPr/>
+        </p:nvSpPr>
+        <p:spPr>
+          <a:xfrm>
+            <a:off x="7762443" y="91440"/>
+            <a:ext cx="73152" cy="274320"/>
+          </a:xfrm>
+          <a:prstGeom prst="rect">
+            <a:avLst/>
+          </a:prstGeom>
+          <a:solidFill>
+            <a:srgbClr val="0369A1"/>
+          </a:solidFill>
+          <a:ln w="12700">
+            <a:solidFill>
+              <a:srgbClr val="0369A1"/>
+            </a:solidFill>
+            <a:prstDash val="solid"/>
+          </a:ln>
+        </p:spPr>
+      </p:sp>
+      <p:pic>
+        <p:nvPicPr>
+          <p:cNvPr id="18" name="Image 0" descr="preencoded.png">    </p:cNvPr>
+          <p:cNvPicPr>
+            <a:picLocks noChangeAspect="1"/>
+          </p:cNvPicPr>
+          <p:nvPr/>
+        </p:nvPicPr>
+        <p:blipFill>
+          <a:blip r:embed="rId1"/>
+          <a:stretch>
+            <a:fillRect/>
+          </a:stretch>
+        </p:blipFill>
+        <p:spPr>
+          <a:xfrm>
+            <a:off x="7890459" y="128016"/>
+            <a:ext cx="201168" cy="201168"/>
+          </a:xfrm>
+          <a:prstGeom prst="rect">
+            <a:avLst/>
+          </a:prstGeom>
+        </p:spPr>
+      </p:pic>
+      <p:sp>
+        <p:nvSpPr>
+          <p:cNvPr id="19" name="Text 16"/>
+          <p:cNvSpPr txBox="1"/>
+          <p:nvPr/>
+        </p:nvSpPr>
+        <p:spPr>
+          <a:xfrm>
+            <a:off x="8146491" y="91440"/>
+            <a:ext cx="3459988" cy="274320"/>
+          </a:xfrm>
+          <a:prstGeom prst="rect">
+            <a:avLst/>
+          </a:prstGeom>
+          <a:noFill/>
+          <a:ln/>
+        </p:spPr>
+        <p:txBody>
+          <a:bodyPr wrap="square" lIns="0" tIns="0" rIns="0" bIns="0" rtlCol="0" anchor="ctr"/>
+          <a:lstStyle/>
+          <a:p>
+            <a:pPr indent="0" marL="0">
+              <a:buNone/>
+            </a:pPr>
+            <a:r>
+              <a:rPr lang="en-US" sz="1100" b="1" dirty="0">
+                <a:solidFill>
+                  <a:srgbClr val="075985"/>
+                </a:solidFill>
+                <a:latin typeface="Calibri" pitchFamily="34" charset="0"/>
+                <a:ea typeface="Calibri" pitchFamily="34" charset="-122"/>
+                <a:cs typeface="Calibri" pitchFamily="34" charset="-120"/>
+              </a:rPr>
+              <a:t>UNDERSTAND NOW</a:t>
+            </a:r>
+            <a:pPr indent="0" marL="0">
+              <a:buNone/>
+            </a:pPr>
+            <a:r>
+              <a:rPr lang="en-US" sz="1100" dirty="0">
+                <a:solidFill>
+                  <a:srgbClr val="075985"/>
+                </a:solidFill>
+                <a:latin typeface="Calibri" pitchFamily="34" charset="0"/>
+                <a:ea typeface="Calibri" pitchFamily="34" charset="-122"/>
+                <a:cs typeface="Calibri" pitchFamily="34" charset="-120"/>
+              </a:rPr>
+              <a:t> · one's complement and excess-k</a:t>
+            </a:r>
+            <a:endParaRPr lang="en-US" sz="1100" dirty="0"/>
           </a:p>
         </p:txBody>
       </p:sp>
@@ -28563,6 +30264,133 @@
       </p:sp>
       <p:sp>
         <p:nvSpPr>
+          <p:cNvPr id="11" name="Shape 7"/>
+          <p:cNvSpPr/>
+          <p:nvPr/>
+        </p:nvSpPr>
+        <p:spPr>
+          <a:xfrm>
+            <a:off x="7762443" y="91440"/>
+            <a:ext cx="3880612" cy="274320"/>
+          </a:xfrm>
+          <a:prstGeom prst="rect">
+            <a:avLst/>
+          </a:prstGeom>
+          <a:solidFill>
+            <a:srgbClr val="E0F2FE"/>
+          </a:solidFill>
+          <a:ln w="12700">
+            <a:solidFill>
+              <a:srgbClr val="0369A1"/>
+            </a:solidFill>
+            <a:prstDash val="solid"/>
+          </a:ln>
+        </p:spPr>
+      </p:sp>
+      <p:sp>
+        <p:nvSpPr>
+          <p:cNvPr id="12" name="Shape 8"/>
+          <p:cNvSpPr/>
+          <p:nvPr/>
+        </p:nvSpPr>
+        <p:spPr>
+          <a:xfrm>
+            <a:off x="7762443" y="91440"/>
+            <a:ext cx="73152" cy="274320"/>
+          </a:xfrm>
+          <a:prstGeom prst="rect">
+            <a:avLst/>
+          </a:prstGeom>
+          <a:solidFill>
+            <a:srgbClr val="0369A1"/>
+          </a:solidFill>
+          <a:ln w="12700">
+            <a:solidFill>
+              <a:srgbClr val="0369A1"/>
+            </a:solidFill>
+            <a:prstDash val="solid"/>
+          </a:ln>
+        </p:spPr>
+      </p:sp>
+      <p:pic>
+        <p:nvPicPr>
+          <p:cNvPr id="13" name="Image 0" descr="preencoded.png">    </p:cNvPr>
+          <p:cNvPicPr>
+            <a:picLocks noChangeAspect="1"/>
+          </p:cNvPicPr>
+          <p:nvPr/>
+        </p:nvPicPr>
+        <p:blipFill>
+          <a:blip r:embed="rId1"/>
+          <a:stretch>
+            <a:fillRect/>
+          </a:stretch>
+        </p:blipFill>
+        <p:spPr>
+          <a:xfrm>
+            <a:off x="7890459" y="128016"/>
+            <a:ext cx="201168" cy="201168"/>
+          </a:xfrm>
+          <a:prstGeom prst="rect">
+            <a:avLst/>
+          </a:prstGeom>
+        </p:spPr>
+      </p:pic>
+      <p:sp>
+        <p:nvSpPr>
+          <p:cNvPr id="14" name="Text 9"/>
+          <p:cNvSpPr txBox="1"/>
+          <p:nvPr/>
+        </p:nvSpPr>
+        <p:spPr>
+          <a:xfrm>
+            <a:off x="8146491" y="91440"/>
+            <a:ext cx="3459988" cy="274320"/>
+          </a:xfrm>
+          <a:prstGeom prst="rect">
+            <a:avLst/>
+          </a:prstGeom>
+          <a:noFill/>
+          <a:ln/>
+        </p:spPr>
+        <p:txBody>
+          <a:bodyPr wrap="square" lIns="0" tIns="0" rIns="0" bIns="0" rtlCol="0" anchor="ctr"/>
+          <a:lstStyle/>
+          <a:p>
+            <a:pPr indent="0" marL="0">
+              <a:buNone/>
+            </a:pPr>
+            <a:r>
+              <a:rPr lang="en-US" sz="1100" b="1" dirty="0">
+                <a:solidFill>
+                  <a:srgbClr val="075985"/>
+                </a:solidFill>
+                <a:latin typeface="Calibri" pitchFamily="34" charset="0"/>
+                <a:ea typeface="Calibri" pitchFamily="34" charset="-122"/>
+                <a:cs typeface="Calibri" pitchFamily="34" charset="-120"/>
+              </a:rPr>
+              <a:t>UNDERSTAND NOW</a:t>
+            </a:r>
+            <a:pPr indent="0" marL="0">
+              <a:buNone/>
+            </a:pPr>
+            <a:r>
+              <a:rPr lang="en-US" sz="1100" dirty="0">
+                <a:solidFill>
+                  <a:srgbClr val="075985"/>
+                </a:solidFill>
+                <a:latin typeface="Calibri" pitchFamily="34" charset="0"/>
+                <a:ea typeface="Calibri" pitchFamily="34" charset="-122"/>
+                <a:cs typeface="Calibri" pitchFamily="34" charset="-120"/>
+              </a:rPr>
+              <a:t> · one's complement and excess-k</a:t>
+            </a:r>
+            <a:endParaRPr lang="en-US" sz="1100" dirty="0"/>
+          </a:p>
+        </p:txBody>
+      </p:sp>
+      <p:sp>
+        <p:nvSpPr>
           <p:cNvPr id="25" name="Slide Number Placeholder 0"/>
           <p:cNvSpPr>
             <a:spLocks noGrp="1"/>
@@ -29112,6 +30940,133 @@
               <a:t>store the number multiplied by a power of two; shift right by f bits to get back the integer part</a:t>
             </a:r>
             <a:endParaRPr lang="en-US" sz="1900" dirty="0"/>
+          </a:p>
+        </p:txBody>
+      </p:sp>
+      <p:sp>
+        <p:nvSpPr>
+          <p:cNvPr id="16" name="Shape 14"/>
+          <p:cNvSpPr/>
+          <p:nvPr/>
+        </p:nvSpPr>
+        <p:spPr>
+          <a:xfrm>
+            <a:off x="8944305" y="91440"/>
+            <a:ext cx="2698750" cy="274320"/>
+          </a:xfrm>
+          <a:prstGeom prst="rect">
+            <a:avLst/>
+          </a:prstGeom>
+          <a:solidFill>
+            <a:srgbClr val="E0F2FE"/>
+          </a:solidFill>
+          <a:ln w="12700">
+            <a:solidFill>
+              <a:srgbClr val="0369A1"/>
+            </a:solidFill>
+            <a:prstDash val="solid"/>
+          </a:ln>
+        </p:spPr>
+      </p:sp>
+      <p:sp>
+        <p:nvSpPr>
+          <p:cNvPr id="17" name="Shape 15"/>
+          <p:cNvSpPr/>
+          <p:nvPr/>
+        </p:nvSpPr>
+        <p:spPr>
+          <a:xfrm>
+            <a:off x="8944305" y="91440"/>
+            <a:ext cx="73152" cy="274320"/>
+          </a:xfrm>
+          <a:prstGeom prst="rect">
+            <a:avLst/>
+          </a:prstGeom>
+          <a:solidFill>
+            <a:srgbClr val="0369A1"/>
+          </a:solidFill>
+          <a:ln w="12700">
+            <a:solidFill>
+              <a:srgbClr val="0369A1"/>
+            </a:solidFill>
+            <a:prstDash val="solid"/>
+          </a:ln>
+        </p:spPr>
+      </p:sp>
+      <p:pic>
+        <p:nvPicPr>
+          <p:cNvPr id="18" name="Image 0" descr="preencoded.png">    </p:cNvPr>
+          <p:cNvPicPr>
+            <a:picLocks noChangeAspect="1"/>
+          </p:cNvPicPr>
+          <p:nvPr/>
+        </p:nvPicPr>
+        <p:blipFill>
+          <a:blip r:embed="rId1"/>
+          <a:stretch>
+            <a:fillRect/>
+          </a:stretch>
+        </p:blipFill>
+        <p:spPr>
+          <a:xfrm>
+            <a:off x="9072321" y="128016"/>
+            <a:ext cx="201168" cy="201168"/>
+          </a:xfrm>
+          <a:prstGeom prst="rect">
+            <a:avLst/>
+          </a:prstGeom>
+        </p:spPr>
+      </p:pic>
+      <p:sp>
+        <p:nvSpPr>
+          <p:cNvPr id="19" name="Text 16"/>
+          <p:cNvSpPr txBox="1"/>
+          <p:nvPr/>
+        </p:nvSpPr>
+        <p:spPr>
+          <a:xfrm>
+            <a:off x="9328353" y="91440"/>
+            <a:ext cx="2278126" cy="274320"/>
+          </a:xfrm>
+          <a:prstGeom prst="rect">
+            <a:avLst/>
+          </a:prstGeom>
+          <a:noFill/>
+          <a:ln/>
+        </p:spPr>
+        <p:txBody>
+          <a:bodyPr wrap="square" lIns="0" tIns="0" rIns="0" bIns="0" rtlCol="0" anchor="ctr"/>
+          <a:lstStyle/>
+          <a:p>
+            <a:pPr indent="0" marL="0">
+              <a:buNone/>
+            </a:pPr>
+            <a:r>
+              <a:rPr lang="en-US" sz="1100" b="1" dirty="0">
+                <a:solidFill>
+                  <a:srgbClr val="075985"/>
+                </a:solidFill>
+                <a:latin typeface="Calibri" pitchFamily="34" charset="0"/>
+                <a:ea typeface="Calibri" pitchFamily="34" charset="-122"/>
+                <a:cs typeface="Calibri" pitchFamily="34" charset="-120"/>
+              </a:rPr>
+              <a:t>UNDERSTAND NOW</a:t>
+            </a:r>
+            <a:pPr indent="0" marL="0">
+              <a:buNone/>
+            </a:pPr>
+            <a:r>
+              <a:rPr lang="en-US" sz="1100" dirty="0">
+                <a:solidFill>
+                  <a:srgbClr val="075985"/>
+                </a:solidFill>
+                <a:latin typeface="Calibri" pitchFamily="34" charset="0"/>
+                <a:ea typeface="Calibri" pitchFamily="34" charset="-122"/>
+                <a:cs typeface="Calibri" pitchFamily="34" charset="-120"/>
+              </a:rPr>
+              <a:t> · fixed point</a:t>
+            </a:r>
+            <a:endParaRPr lang="en-US" sz="1100" dirty="0"/>
           </a:p>
         </p:txBody>
       </p:sp>
@@ -29691,6 +31646,133 @@
       </p:sp>
       <p:sp>
         <p:nvSpPr>
+          <p:cNvPr id="16" name="Shape 14"/>
+          <p:cNvSpPr/>
+          <p:nvPr/>
+        </p:nvSpPr>
+        <p:spPr>
+          <a:xfrm>
+            <a:off x="8944305" y="91440"/>
+            <a:ext cx="2698750" cy="274320"/>
+          </a:xfrm>
+          <a:prstGeom prst="rect">
+            <a:avLst/>
+          </a:prstGeom>
+          <a:solidFill>
+            <a:srgbClr val="E0F2FE"/>
+          </a:solidFill>
+          <a:ln w="12700">
+            <a:solidFill>
+              <a:srgbClr val="0369A1"/>
+            </a:solidFill>
+            <a:prstDash val="solid"/>
+          </a:ln>
+        </p:spPr>
+      </p:sp>
+      <p:sp>
+        <p:nvSpPr>
+          <p:cNvPr id="17" name="Shape 15"/>
+          <p:cNvSpPr/>
+          <p:nvPr/>
+        </p:nvSpPr>
+        <p:spPr>
+          <a:xfrm>
+            <a:off x="8944305" y="91440"/>
+            <a:ext cx="73152" cy="274320"/>
+          </a:xfrm>
+          <a:prstGeom prst="rect">
+            <a:avLst/>
+          </a:prstGeom>
+          <a:solidFill>
+            <a:srgbClr val="0369A1"/>
+          </a:solidFill>
+          <a:ln w="12700">
+            <a:solidFill>
+              <a:srgbClr val="0369A1"/>
+            </a:solidFill>
+            <a:prstDash val="solid"/>
+          </a:ln>
+        </p:spPr>
+      </p:sp>
+      <p:pic>
+        <p:nvPicPr>
+          <p:cNvPr id="18" name="Image 0" descr="preencoded.png">    </p:cNvPr>
+          <p:cNvPicPr>
+            <a:picLocks noChangeAspect="1"/>
+          </p:cNvPicPr>
+          <p:nvPr/>
+        </p:nvPicPr>
+        <p:blipFill>
+          <a:blip r:embed="rId1"/>
+          <a:stretch>
+            <a:fillRect/>
+          </a:stretch>
+        </p:blipFill>
+        <p:spPr>
+          <a:xfrm>
+            <a:off x="9072321" y="128016"/>
+            <a:ext cx="201168" cy="201168"/>
+          </a:xfrm>
+          <a:prstGeom prst="rect">
+            <a:avLst/>
+          </a:prstGeom>
+        </p:spPr>
+      </p:pic>
+      <p:sp>
+        <p:nvSpPr>
+          <p:cNvPr id="19" name="Text 16"/>
+          <p:cNvSpPr txBox="1"/>
+          <p:nvPr/>
+        </p:nvSpPr>
+        <p:spPr>
+          <a:xfrm>
+            <a:off x="9328353" y="91440"/>
+            <a:ext cx="2278126" cy="274320"/>
+          </a:xfrm>
+          <a:prstGeom prst="rect">
+            <a:avLst/>
+          </a:prstGeom>
+          <a:noFill/>
+          <a:ln/>
+        </p:spPr>
+        <p:txBody>
+          <a:bodyPr wrap="square" lIns="0" tIns="0" rIns="0" bIns="0" rtlCol="0" anchor="ctr"/>
+          <a:lstStyle/>
+          <a:p>
+            <a:pPr indent="0" marL="0">
+              <a:buNone/>
+            </a:pPr>
+            <a:r>
+              <a:rPr lang="en-US" sz="1100" b="1" dirty="0">
+                <a:solidFill>
+                  <a:srgbClr val="075985"/>
+                </a:solidFill>
+                <a:latin typeface="Calibri" pitchFamily="34" charset="0"/>
+                <a:ea typeface="Calibri" pitchFamily="34" charset="-122"/>
+                <a:cs typeface="Calibri" pitchFamily="34" charset="-120"/>
+              </a:rPr>
+              <a:t>UNDERSTAND NOW</a:t>
+            </a:r>
+            <a:pPr indent="0" marL="0">
+              <a:buNone/>
+            </a:pPr>
+            <a:r>
+              <a:rPr lang="en-US" sz="1100" dirty="0">
+                <a:solidFill>
+                  <a:srgbClr val="075985"/>
+                </a:solidFill>
+                <a:latin typeface="Calibri" pitchFamily="34" charset="0"/>
+                <a:ea typeface="Calibri" pitchFamily="34" charset="-122"/>
+                <a:cs typeface="Calibri" pitchFamily="34" charset="-120"/>
+              </a:rPr>
+              <a:t> · fixed point</a:t>
+            </a:r>
+            <a:endParaRPr lang="en-US" sz="1100" dirty="0"/>
+          </a:p>
+        </p:txBody>
+      </p:sp>
+      <p:sp>
+        <p:nvSpPr>
           <p:cNvPr id="25" name="Slide Number Placeholder 0"/>
           <p:cNvSpPr>
             <a:spLocks noGrp="1"/>
@@ -30233,6 +32315,133 @@
               <a:t>mantissa, base and exponent: the scientific notation of the laboratory, in binary</a:t>
             </a:r>
             <a:endParaRPr lang="en-US" sz="1900" dirty="0"/>
+          </a:p>
+        </p:txBody>
+      </p:sp>
+      <p:sp>
+        <p:nvSpPr>
+          <p:cNvPr id="14" name="Shape 12"/>
+          <p:cNvSpPr/>
+          <p:nvPr/>
+        </p:nvSpPr>
+        <p:spPr>
+          <a:xfrm>
+            <a:off x="8156397" y="91440"/>
+            <a:ext cx="3486658" cy="274320"/>
+          </a:xfrm>
+          <a:prstGeom prst="rect">
+            <a:avLst/>
+          </a:prstGeom>
+          <a:solidFill>
+            <a:srgbClr val="E0F2FE"/>
+          </a:solidFill>
+          <a:ln w="12700">
+            <a:solidFill>
+              <a:srgbClr val="0369A1"/>
+            </a:solidFill>
+            <a:prstDash val="solid"/>
+          </a:ln>
+        </p:spPr>
+      </p:sp>
+      <p:sp>
+        <p:nvSpPr>
+          <p:cNvPr id="15" name="Shape 13"/>
+          <p:cNvSpPr/>
+          <p:nvPr/>
+        </p:nvSpPr>
+        <p:spPr>
+          <a:xfrm>
+            <a:off x="8156397" y="91440"/>
+            <a:ext cx="73152" cy="274320"/>
+          </a:xfrm>
+          <a:prstGeom prst="rect">
+            <a:avLst/>
+          </a:prstGeom>
+          <a:solidFill>
+            <a:srgbClr val="0369A1"/>
+          </a:solidFill>
+          <a:ln w="12700">
+            <a:solidFill>
+              <a:srgbClr val="0369A1"/>
+            </a:solidFill>
+            <a:prstDash val="solid"/>
+          </a:ln>
+        </p:spPr>
+      </p:sp>
+      <p:pic>
+        <p:nvPicPr>
+          <p:cNvPr id="16" name="Image 0" descr="preencoded.png">    </p:cNvPr>
+          <p:cNvPicPr>
+            <a:picLocks noChangeAspect="1"/>
+          </p:cNvPicPr>
+          <p:nvPr/>
+        </p:nvPicPr>
+        <p:blipFill>
+          <a:blip r:embed="rId1"/>
+          <a:stretch>
+            <a:fillRect/>
+          </a:stretch>
+        </p:blipFill>
+        <p:spPr>
+          <a:xfrm>
+            <a:off x="8284413" y="128016"/>
+            <a:ext cx="201168" cy="201168"/>
+          </a:xfrm>
+          <a:prstGeom prst="rect">
+            <a:avLst/>
+          </a:prstGeom>
+        </p:spPr>
+      </p:pic>
+      <p:sp>
+        <p:nvSpPr>
+          <p:cNvPr id="17" name="Text 14"/>
+          <p:cNvSpPr txBox="1"/>
+          <p:nvPr/>
+        </p:nvSpPr>
+        <p:spPr>
+          <a:xfrm>
+            <a:off x="8540445" y="91440"/>
+            <a:ext cx="3066034" cy="274320"/>
+          </a:xfrm>
+          <a:prstGeom prst="rect">
+            <a:avLst/>
+          </a:prstGeom>
+          <a:noFill/>
+          <a:ln/>
+        </p:spPr>
+        <p:txBody>
+          <a:bodyPr wrap="square" lIns="0" tIns="0" rIns="0" bIns="0" rtlCol="0" anchor="ctr"/>
+          <a:lstStyle/>
+          <a:p>
+            <a:pPr indent="0" marL="0">
+              <a:buNone/>
+            </a:pPr>
+            <a:r>
+              <a:rPr lang="en-US" sz="1100" b="1" dirty="0">
+                <a:solidFill>
+                  <a:srgbClr val="075985"/>
+                </a:solidFill>
+                <a:latin typeface="Calibri" pitchFamily="34" charset="0"/>
+                <a:ea typeface="Calibri" pitchFamily="34" charset="-122"/>
+                <a:cs typeface="Calibri" pitchFamily="34" charset="-120"/>
+              </a:rPr>
+              <a:t>UNDERSTAND NOW</a:t>
+            </a:r>
+            <a:pPr indent="0" marL="0">
+              <a:buNone/>
+            </a:pPr>
+            <a:r>
+              <a:rPr lang="en-US" sz="1100" dirty="0">
+                <a:solidFill>
+                  <a:srgbClr val="075985"/>
+                </a:solidFill>
+                <a:latin typeface="Calibri" pitchFamily="34" charset="0"/>
+                <a:ea typeface="Calibri" pitchFamily="34" charset="-122"/>
+                <a:cs typeface="Calibri" pitchFamily="34" charset="-120"/>
+              </a:rPr>
+              <a:t> · IEEE 754 floating point</a:t>
+            </a:r>
+            <a:endParaRPr lang="en-US" sz="1100" dirty="0"/>
           </a:p>
         </p:txBody>
       </p:sp>

--- a/en/slides/06-Computer_Architecture-Number_Representation_Reals.pptx
+++ b/en/slides/06-Computer_Architecture-Number_Representation_Reals.pptx
@@ -126,13 +126,13 @@
   <p:extLst>
     <p:ext uri="{521415D9-36F7-43E2-AB2F-B90AF26B5E84}">
       <p14:sectionLst xmlns:p14="http://schemas.microsoft.com/office/powerpoint/2010/main">
-        <p14:section name="Opening" id="{57cffda0-f76d-06dc-a987-7057ef12ac49}">
+        <p14:section name="Opening" id="{4102faa4-139d-5f08-94ef-865c808c48d0}">
           <p14:sldIdLst>
             <p14:sldId id="256"/>
             <p14:sldId id="257"/>
           </p14:sldIdLst>
         </p14:section>
-        <p14:section name="More encodings for signed integers" id="{98f21a5a-33a9-3d0c-b858-c4630b70dec4}">
+        <p14:section name="More encodings for signed integers" id="{038e3847-3459-9ae4-298d-849dd55af2fd}">
           <p14:sldIdLst>
             <p14:sldId id="258"/>
             <p14:sldId id="259"/>
@@ -140,13 +140,13 @@
             <p14:sldId id="261"/>
           </p14:sldIdLst>
         </p14:section>
-        <p14:section name="Fixed point" id="{55ed587e-d625-6850-6e68-d060c23736ba}">
+        <p14:section name="Fixed point" id="{7cfc25d0-71ad-fb9d-7a60-f57aeb82125c}">
           <p14:sldIdLst>
             <p14:sldId id="262"/>
             <p14:sldId id="263"/>
           </p14:sldIdLst>
         </p14:section>
-        <p14:section name="Floating point" id="{5169d299-71dd-4e03-2867-4f9bcdbeb138}">
+        <p14:section name="Floating point" id="{b1eb87ae-6096-c95d-9b5b-ee263239830b}">
           <p14:sldIdLst>
             <p14:sldId id="264"/>
             <p14:sldId id="265"/>
@@ -156,7 +156,7 @@
             <p14:sldId id="269"/>
           </p14:sldIdLst>
         </p14:section>
-        <p14:section name="Back to the machine" id="{415c41a1-ccdf-58f6-3304-678135d37c01}">
+        <p14:section name="Back to the machine" id="{093cf1ed-02da-84b3-d91a-db7c8cf066d0}">
           <p14:sldIdLst>
             <p14:sldId id="270"/>
             <p14:sldId id="271"/>

--- a/en/slides/06-Computer_Architecture-Number_Representation_Reals.pptx
+++ b/en/slides/06-Computer_Architecture-Number_Representation_Reals.pptx
@@ -126,13 +126,13 @@
   <p:extLst>
     <p:ext uri="{521415D9-36F7-43E2-AB2F-B90AF26B5E84}">
       <p14:sectionLst xmlns:p14="http://schemas.microsoft.com/office/powerpoint/2010/main">
-        <p14:section name="Opening" id="{4102faa4-139d-5f08-94ef-865c808c48d0}">
+        <p14:section name="Opening" id="{4eabdd4b-746b-9715-6b40-852613d10dd0}">
           <p14:sldIdLst>
             <p14:sldId id="256"/>
             <p14:sldId id="257"/>
           </p14:sldIdLst>
         </p14:section>
-        <p14:section name="More encodings for signed integers" id="{038e3847-3459-9ae4-298d-849dd55af2fd}">
+        <p14:section name="More encodings for signed integers" id="{9003a16d-b393-c37f-d6f4-af0a8ad1942b}">
           <p14:sldIdLst>
             <p14:sldId id="258"/>
             <p14:sldId id="259"/>
@@ -140,13 +140,13 @@
             <p14:sldId id="261"/>
           </p14:sldIdLst>
         </p14:section>
-        <p14:section name="Fixed point" id="{7cfc25d0-71ad-fb9d-7a60-f57aeb82125c}">
+        <p14:section name="Fixed point" id="{3b6a253d-fb63-9de1-00bd-2ff108b8630f}">
           <p14:sldIdLst>
             <p14:sldId id="262"/>
             <p14:sldId id="263"/>
           </p14:sldIdLst>
         </p14:section>
-        <p14:section name="Floating point" id="{b1eb87ae-6096-c95d-9b5b-ee263239830b}">
+        <p14:section name="Floating point" id="{35a535c0-6716-4fcd-3210-49f13fc791c1}">
           <p14:sldIdLst>
             <p14:sldId id="264"/>
             <p14:sldId id="265"/>
@@ -156,7 +156,7 @@
             <p14:sldId id="269"/>
           </p14:sldIdLst>
         </p14:section>
-        <p14:section name="Back to the machine" id="{093cf1ed-02da-84b3-d91a-db7c8cf066d0}">
+        <p14:section name="Back to the machine" id="{1733fcce-f13e-7b37-4688-346328ed39b7}">
           <p14:sldIdLst>
             <p14:sldId id="270"/>
             <p14:sldId id="271"/>
@@ -570,7 +570,7 @@
           <a:p>
             <a:r>
               <a:rPr lang="en-US" dirty="0"/>
-              <a:t>The previous lecture dealt with whole numbers. This one deals with numbers that have a fractional part, and it starts from a practical problem: a ball that must move by less than one pixel per frame, on a processor that has no instructions for real numbers. The solution, fixed point, uses only what you already know. Floating point then appears as the general answer, with the standard that every computer follows, IEEE 754.
+              <a:t>The previous lecture treated integers; this one treats numbers with a fractional part. It begins from a concrete engineering problem: a ball must move by less than one pixel per frame, on a processor with no instructions for real numbers. The first solution, fixed point, uses nothing beyond integer arithmetic already understood. Floating point then emerges as the general solution, together with the standard to which essentially every computer conforms, IEEE 754. The lecture is thus organised as a progression from a specific constraint to a general theory, and back to the constraint.
 Learning status: UNDERSTAND NOW, by the end of this lecture you explain it, trace it and apply it on your own; USE NOW, you follow and use the recipe today; how it works inside is explained later, or is not part of the course; UNDERSTAND LATER, recognise the name and what it is for; a later lecture explains it. A slide without a badge is context: a story, an example, a question, an exercise.
 Learning status of this lecture. UNDERSTAND NOW: fixed point; one's complement and excess-k; IEEE 754 floating point; the name RV32IMAC. USE NOW: the complete program, the PRG32 tools (used, not studied, in this course). UNDERSTAND LATER: nothing. A slide without a badge is context: a story, an example, a question, an exercise.
 For the lecturer: Spiral: the lecture opens with a ball that must move less than one pixel per frame on a processor with no floating-point unit. Fixed point solves it; floating point is then presented as the general answer, with IEEE 754.</a:t>
@@ -661,7 +661,7 @@
           <a:p>
             <a:r>
               <a:rPr lang="en-US" dirty="0"/>
-              <a:t>In floating point the distance between two consecutive representable numbers is not constant. Near zero they are extremely close together; near the upper limit they are far apart. The absolute error therefore grows with the size of the number. What stays constant is the relative error, because every number has the same number of significant digits: four in this example. It is the opposite of fixed point, where the absolute error is constant and the relative error becomes large near zero.
+              <a:t>In floating point the spacing between consecutive representable numbers is not uniform: it is very fine near zero and coarse near the upper limit of the range. The absolute error therefore grows with the magnitude of the number. What remains approximately constant is the relative error, because every number carries the same number of significant digits, four in this example. Fixed point exhibits the opposite behaviour: constant absolute error, with relative error that becomes large near zero. The choice between the two is a choice of which error matters for the application.
 UNDERSTAND NOW: IEEE 754 floating point.
 For the lecturer: This is the opposite of fixed point, where the absolute error is constant and the relative error explodes near zero.</a:t>
             </a:r>
@@ -751,7 +751,7 @@
           <a:p>
             <a:r>
               <a:rPr lang="en-US" dirty="0"/>
-              <a:t>The single-precision format of IEEE 754 divides 32 bits into three fields: one bit of sign, eight of exponent, twenty-three of fraction. The value is given by the formula in the middle. Two details deserve attention. A normalised binary mantissa always begins with 1, so that bit is not stored: it is the hidden bit, and it gives one more bit of precision for free. And the exponent is stored in excess-127, the encoding of the previous section, so that exponents can be compared as natural numbers.
+              <a:t>The IEEE 754 single-precision format divides 32 bits into three fields: one sign bit, eight exponent bits and twenty-three fraction bits, with the value given by the formula in the centre. Two design decisions deserve attention. A normalised binary mantissa always begins with 1, so that bit need not be stored: it is the hidden bit, which yields one additional bit of precision at no cost. And the exponent is stored in excess-127, the encoding of the previous section, so that floating-point numbers of the same sign can be compared as natural numbers.
 UNDERSTAND NOW: IEEE 754 floating point.
 For the lecturer: IEEE 754 dates from 1985 (revised 2008 and 2019). Before it, every manufacturer had its own format and programs gave different results on different machines.</a:t>
             </a:r>
@@ -841,7 +841,7 @@
           <a:p>
             <a:r>
               <a:rPr lang="en-US" dirty="0"/>
-              <a:t>A complete example: minus 5.125. Convert the two parts to binary: 5 is 101 and 0.125 is 0.001, so the number is 101.001. Normalise by moving the point two places: 1.01001 times 2 to the 2. The sign bit is 1. The exponent field is 2 plus 127, 129, that is 1000 0001. The fraction is 01001 followed by zeros, without the leading 1. Putting the three fields together and regrouping in fours gives 0xC0A40000. Redo it on paper, then try with another number.
+              <a:t>A complete worked example: -5.125. The integer and fractional parts are converted separately: 5 is 101 and 0.125 is 0.001, so the number is 101.001. Normalisation moves the point two places: 1.01001 times 2^2. The sign bit is 1. The exponent field is 2 + 127 = 129, that is, 1000 0001. The fraction field is 01001 followed by zeros, without the leading 1. Concatenating the three fields and regrouping by four bits gives 0xC0A40000. The example should be reproduced on paper and then repeated with a number of one's own choosing.
 UNDERSTAND NOW: IEEE 754 floating point.
 For the lecturer: Check the regrouping in nibbles: 1100 = C, 0000 = 0, 1010 = A, 0100 = 4, then zeros. Three slides of the source deck are merged here.</a:t>
             </a:r>
@@ -931,7 +931,7 @@
           <a:p>
             <a:r>
               <a:rPr lang="en-US" dirty="0"/>
-              <a:t>Single and double precision side by side. Double precision has 64 bits, 11 of exponent in excess-1023 and 52 of fraction. Two rows are worth remembering as orders of magnitude: single precision gives about 7 significant decimal digits and reaches about 10 to the 38; double precision gives about 16 digits and reaches about 10 to the 308. The types float and double of the C language are these two formats.
+              <a:t>Single and double precision compared. Double precision uses 64 bits, with 11 exponent bits in excess-1023 and 52 fraction bits. Two rows are worth retaining as orders of magnitude: single precision provides about 7 significant decimal digits and a range reaching about 10^38; double precision about 16 digits and a range reaching about 10^308. The C types float and double correspond to these two formats on essentially every modern platform.
 UNDERSTAND NOW: IEEE 754 floating point.
 For the lecturer: Corrections to the source table: the double-precision exponent is in excess-1023 (not 1024), and the decimal ranges are about 10^38 and 10^308.</a:t>
             </a:r>
@@ -1021,7 +1021,7 @@
           <a:p>
             <a:r>
               <a:rPr lang="en-US" dirty="0"/>
-              <a:t>Not all the patterns are ordinary numbers. An exponent field between the two extremes is a normalised number. An exponent of all zeros means zero, if the fraction is zero too, or a denormalised number, which fills the gap around zero with decreasing precision. An exponent of all ones means infinity, if the fraction is zero, or NaN, "not a number", the result of an invalid operation such as zero divided by zero. Note that there are two zeros, plus and minus, and that NaN is not equal to anything, itself included.
+              <a:t>Not every pattern encodes an ordinary number. An exponent field strictly between its extremes denotes a normalised number. An exponent of all zeros denotes zero, if the fraction is also zero, or a denormalised number, which fills the gap around zero with gradually decreasing precision. An exponent of all ones denotes infinity, if the fraction is zero, or NaN, "not a number", the result of an invalid operation such as zero divided by zero. Two consequences are counter-intuitive and worth noting: there are two zeros, positive and negative, and NaN compares unequal to everything, itself included.
 UNDERSTAND NOW: IEEE 754 floating point.
 For the lecturer: Denormalised (subnormal) numbers fill the underflow gap around zero with gradually decreasing precision. 1/0 gives infinity; 0/0 and the square root of -1 give NaN. NaN is not equal to anything, itself included.</a:t>
             </a:r>
@@ -1111,7 +1111,7 @@
           <a:p>
             <a:r>
               <a:rPr lang="en-US" dirty="0"/>
-              <a:t>RISC-V handles floating point through two optional extensions, F for single precision and D for double: they add thirty-two registers, f0 to f31, and instructions such as fadd.s. The processor of the kit, RV32IMAC, has neither. A C program can still use float, but each operation becomes a call to a software routine that costs tens or hundreds of integer instructions. This is why PRG32 games use integers and fixed point: they are fast, exact enough, and visible in the debugger.
+              <a:t>RISC-V supports floating point through two optional extensions, F for single precision and D for double, which add thirty-two registers, f0 to f31, and instructions such as fadd.s. The processor of the kit, RV32IMAC, implements neither. A C program may still use float, but each operation is then compiled into a call to a software routine costing tens or hundreds of integer instructions. This is why PRG32 games use integers and fixed point: they are fast, sufficiently precise for the purpose, and transparent in the debugger.
 UNDERSTAND NOW: IEEE 754 floating point.
 For the lecturer: The software routines implement exactly the algorithm of this lecture with shifts, masks and integer additions: a good reading exercise for the end of the course.</a:t>
             </a:r>
@@ -1201,7 +1201,7 @@
           <a:p>
             <a:r>
               <a:rPr lang="en-US" dirty="0"/>
-              <a:t>The name RV32IMAC can now be read letter by letter. RV32I is the base: 32-bit registers and the integer instructions. M adds multiplication and division. A adds the atomic instructions for sharing data safely between tasks. C adds compressed, 16-bit encodings of the most common instructions. F and D, the floating-point extensions, are absent. This modularity is a design choice of RISC-V: a small mandatory base and optional extensions, so that the same architecture fits a cheap microcontroller and a supercomputer.
+              <a:t>The name RV32IMAC can now be read letter by letter. RV32I is the base: 32-bit registers and the integer instructions. M adds multiplication and division. A adds atomic instructions, for safe sharing of data among concurrent tasks. C adds compressed, 16-bit encodings of the most frequent instructions. F and D, the floating-point extensions, are absent. This modularity is a central design principle of RISC-V: a small mandatory base and optional extensions, so that the same architecture can serve an inexpensive microcontroller and a supercomputer.
 UNDERSTAND NOW: the name RV32IMAC.
 For the lecturer: RISC-V is modular: a small mandatory base plus optional extensions. A microcontroller picks what it needs; this is one reason the same architecture scales from a two-euro chip to a supercomputer.</a:t>
             </a:r>
@@ -1291,8 +1291,8 @@
           <a:p>
             <a:r>
               <a:rPr lang="en-US" dirty="0"/>
-              <a:t>Think of what each encoding does to the order. In sign and magnitude and in the complements, negative numbers have the leftmost bit at 1, so as patterns they come after the positive ones. Only an encoding that adds a constant to every number keeps the order intact.
-Q24.8 means that the word is the number multiplied by 256. Read 0x180 as an integer and divide by 256; or split it directly: integer part 0x01, fraction 0x80, which is 128/256.
+              <a:t>For the first question, one should consider what each encoding does to ordering. In sign and magnitude and in both complements, negative numbers have a leftmost 1 and therefore, read as patterns, follow the positive ones. Only an encoding that adds a constant to every number preserves the order.
+For the second, Q24.8 means that the word contains the number multiplied by 256. 0x180 is read as an integer and divided by 256; alternatively it is split directly into integer part 0x01 and fraction 0x80, that is, 128/256.
 For the lecturer: 1. Answer: D. In excess-k, X = x + k: a larger number always has a larger pattern. This is why it encodes floating-point exponents, which must be compared quickly.
 2. Answer: B. 0x180 = 384; 384 / 256 = 1.5. Integer part 0x01, fraction 0x80 = 128/256 = 0.5.</a:t>
             </a:r>
@@ -1382,8 +1382,8 @@
           <a:p>
             <a:r>
               <a:rPr lang="en-US" dirty="0"/>
-              <a:t>Write the first hexadecimal digits in binary and cut the fields: one bit of sign, eight of exponent, then the fraction. Subtract 127 from the exponent, and do not forget the hidden 1 in front of the fraction.
-Go back to the table of the special patterns. An exponent of all ones is reserved: which of its two cases has a fraction of all zeros?
+              <a:t>For the first question, the leading hexadecimal digits are written in binary and the fields separated: one sign bit, eight exponent bits, then the fraction. The bias of 127 is subtracted from the exponent, and the hidden 1 restored in front of the fraction.
+For the second, the table of special patterns should be consulted. An exponent of all ones is reserved; the question is which of its two cases has a fraction of all zeros.
 For the lecturer: 1. Answer: B. 0100 0000 0100 0000 ...: S = 0, E = 1000 0000 = 128, F = 100...: 1.1 (binary) x 2^(128-127) = 1.5 x 2 = 3.0.
 2. Answer: C. All ones in the exponent: infinity if the fraction is zero, NaN otherwise.</a:t>
             </a:r>
@@ -1473,7 +1473,7 @@
           <a:p>
             <a:r>
               <a:rPr lang="en-US" dirty="0"/>
-              <a:t>Twelve terms. In Italian the decimal separator is a comma, so fixed point and floating point are virgola fissa and virgola mobile. Mantissa is the traditional word for the significant digits; the standard calls the stored part fraction. The hidden bit is the leading 1 that is not stored. Denormalised numbers are also called subnormal.</a:t>
+              <a:t>Twelve terms. In Italian the decimal separator is the comma, so fixed point and floating point become virgola fissa and virgola mobile. Mantissa is the traditional term for the significant digits; the standard calls the stored part the fraction. The hidden bit is the leading 1 that is not stored. Denormalised numbers are also termed subnormal.</a:t>
             </a:r>
             <a:endParaRPr lang="en-US" dirty="0"/>
           </a:p>
@@ -1561,7 +1561,7 @@
           <a:p>
             <a:r>
               <a:rPr lang="en-US" dirty="0"/>
-              <a:t>Six objectives. Two encodings of signed integers that complete the previous lecture, one's complement and excess-k: they are needed to understand floating point. Then fixed point, which you will use in the project. Then floating point: mantissa, exponent, normalisation, encoding and decoding a number in single precision, and the special patterns. Finally a fact about your own kit: its processor has no floating-point instructions, and you will be able to say what programs do instead.</a:t>
+              <a:t>Six learning outcomes. Two further encodings of signed integers, one's complement and excess-k, complete the previous lecture and are prerequisites for floating point. Fixed-point representation follows, which the course project will use. Then floating point: mantissa, exponent and normalisation, encoding and decoding in single precision, and the special patterns. The final outcome concerns the student's own kit: its processor has no floating-point instructions, and the student should be able to explain what programs do instead, and why.</a:t>
             </a:r>
             <a:endParaRPr lang="en-US" dirty="0"/>
           </a:p>
@@ -1649,7 +1649,7 @@
           <a:p>
             <a:r>
               <a:rPr lang="en-US" dirty="0"/>
-              <a:t>Five conclusions. Integers have several representations, chosen according to use. Fixed point stores a fraction as a scaled integer: constant absolute error, the speed of integers. Floating point stores mantissa and exponent: an enormous range, constant relative error. IEEE 754 is the universal standard, with special patterns for zero, infinity and NaN. And on a processor without the F extension, fixed point is the natural choice. Next comes the first part of Verm1, where the last four lectures are put to work.
+              <a:t>Five conclusions. Integers admit several representations, chosen according to use. Fixed point stores a fraction as a scaled integer, with constant absolute error and the speed of integer arithmetic. Floating point stores mantissa and exponent, with an enormous range and approximately constant relative error. IEEE 754 is the universal standard, with special patterns for zero, infinity and NaN. On a processor lacking the F extension, fixed point is the natural choice. The next lecture is the first part of Verm1, in which the content of the last four lectures is put to work.
 Learning status, recap. UNDERSTAND NOW: fixed point; one's complement and excess-k; IEEE 754 floating point; the name RV32IMAC. USE NOW: the complete program, the PRG32 tools (used, not studied, in this course). UNDERSTAND LATER: nothing. A slide without a badge is context: a story, an example, a question, an exercise.
 For the lecturer: Next: Verm1, part 1, where the first four lectures go to work in a real program. Then Boolean algebra.</a:t>
             </a:r>
@@ -1739,7 +1739,7 @@
           <a:p>
             <a:r>
               <a:rPr lang="en-US" dirty="0"/>
-              <a:t>In one's complement a negative number is obtained by inverting every bit of the positive one: 6 is 0110, minus 6 is 1001. Changing sign is as simple as it can be. The price is the same as for sign and magnitude: zero has two representations, 0000 and 1111, and the range is symmetric, from minus 7 to plus 7 on four bits. The instruction not of RISC-V computes exactly the one's complement of a register.
+              <a:t>In one's complement a negative number is obtained by inverting every bit of its positive counterpart: 6 is 0110, -6 is 1001. Negation could not be simpler. The cost is that already paid by sign and magnitude: zero has two representations, 0000 and 1111, and the range is symmetric, from -7 to +7 on four bits. The RISC-V instruction not computes precisely the one's complement of a register, and the previous lecture showed that adding 1 to it yields the two's complement.
 UNDERSTAND NOW: one's complement and excess-k.
 For the lecturer: Also called diminished radix complement (complemento alla base diminuita). The bitwise not of RISC-V computes exactly this.</a:t>
             </a:r>
@@ -1829,7 +1829,7 @@
           <a:p>
             <a:r>
               <a:rPr lang="en-US" dirty="0"/>
-              <a:t>Addition in one's complement works with the ordinary adder, with one correction: when there is a carry out of the leftmost bit, 1 must be added to the result. It is called the end-around carry. The first example needs no correction. In the second and third, the carry out is brought round and added. The extra step and the double zero are the reasons why two's complement, in which the carry is simply discarded, won.
+              <a:t>Addition in one's complement uses an ordinary binary adder with one correction: when a carry leaves the most significant position, 1 must be added to the result, an operation known as the end-around carry. The first example requires no correction; in the second and third the outgoing carry is brought round and added. This extra step, together with the double zero, explains why two's complement, in which the outgoing carry is simply discarded, prevailed in the design of arithmetic units.
 UNDERSTAND NOW: one's complement and excess-k.
 For the lecturer: The source slides call the carry an 'overflow in the arithmetic of positive integers': it is the carry out of the natural-number adder, reinterpreted as the need for a correction.</a:t>
             </a:r>
@@ -1919,7 +1919,7 @@
           <a:p>
             <a:r>
               <a:rPr lang="en-US" dirty="0"/>
-              <a:t>In excess-k every number is shifted upward by a constant: X = x + k. With four bits and k = 8, the pattern 0000 means minus 8, 1000 means zero and 1111 means plus 7. The valuable property is that order is preserved: a larger number always has a larger pattern, so two signed numbers can be compared as if they were naturals. Arithmetic is less convenient, because every sum must be corrected. This is the encoding of the exponent in floating-point numbers.
+              <a:t>In excess-k representation every number is displaced upwards by a constant: X = x + k. With four bits and k = 8, the pattern 0000 denotes -8, 1000 denotes zero and 1111 denotes +7. Its valuable property is order preservation: a larger number always has a larger pattern, so two signed values can be compared as though they were natural numbers. Arithmetic is less convenient, since every sum must be corrected by subtracting k. This is precisely the encoding of the exponent in floating-point formats, where fast comparison matters more than convenient addition.
 UNDERSTAND NOW: one's complement and excess-k.
 For the lecturer: Excess-8 on four bits: 0000 = -8, 1000 = 0, 1111 = +7. Compare with two's complement: the same range, with the most significant bit inverted.</a:t>
             </a:r>
@@ -2009,7 +2009,7 @@
           <a:p>
             <a:r>
               <a:rPr lang="en-US" dirty="0"/>
-              <a:t>The table of Lecture 05 with two more columns: the same sixteen patterns read as unsigned, sign and magnitude, one's complement, two's complement and excess-8. Three observations. Sign and magnitude and one's complement have two zeros, highlighted. Two's complement and excess-8 cover the same range, minus 8 to plus 7, and differ only in the leftmost bit. And excess-8 is the only column in which the values grow steadily from the top to the bottom of the table.
+              <a:t>The table of Lecture 05, extended by two columns: the same sixteen patterns read as unsigned, sign and magnitude, one's complement, two's complement and excess-8. Three observations. Sign and magnitude and one's complement each have two zeros, highlighted. Two's complement and excess-8 cover the same range, -8 to +7, and differ only in the leftmost bit. And excess-8 is the only column in which values increase monotonically from the top of the table to the bottom, which is the order-preservation property in visual form.
 UNDERSTAND NOW: one's complement and excess-k.
 For the lecturer: This table replaces the comparison picture of the source deck ('Numeri relativi: complementi').</a:t>
             </a:r>
@@ -2099,7 +2099,7 @@
           <a:p>
             <a:r>
               <a:rPr lang="en-US" dirty="0"/>
-              <a:t>In fixed point the integer part and the fractional part sit side by side in one word, and the position of the point is fixed. It is not stored anywhere: it is an agreement that the program knows. If f bits are reserved for the fraction, the word contains the number multiplied by 2 to the f, and the smallest step that can be represented, the resolution, is 2 to the minus f. The notation Qm.f says how the bits are divided: Q24.8 means 24 integer bits and 8 fractional bits.
+              <a:t>In fixed point the integer and fractional parts occupy adjacent positions within one word, and the position of the binary point is fixed. It is stored nowhere: it is a convention known to the program. If f bits are reserved for the fraction, the word contains the number multiplied by 2^f, and the smallest representable increment, the resolution, is 2^-f. The notation Qm.f specifies the division of the bits: Q24.8 denotes 24 integer bits and 8 fractional bits. Arithmetic is ordinary integer arithmetic, with rescaling only where a product or quotient requires it.
 UNDERSTAND NOW: fixed point.
 For the lecturer: Fixed point is how games, audio and control software handle fractions on processors without a floating-point unit. It is also how money should be stored: integer cents.</a:t>
             </a:r>
@@ -2189,7 +2189,7 @@
           <a:p>
             <a:r>
               <a:rPr lang="en-US" dirty="0"/>
-              <a:t>The real numbers are dense: between any two there are infinitely many others, so with a finite number of bits most of them cannot be represented, and each is replaced by the nearest representable one. In Q24.8 the number 0.1 becomes 26/256, about 0.1016. The error is at most half the resolution. A number too close to zero becomes zero: this is underflow, and it is why a speed of 0.001 pixels per frame would leave the ball still. In fixed point the absolute error is the same everywhere.
+              <a:t>The real numbers are dense: between any two there are infinitely many others, so with a finite number of bits most of them cannot be represented, and each is replaced by its nearest representable neighbour. In Q24.8 the number 0.1 becomes 26/256, approximately 0.1016. The error never exceeds half the resolution. A value sufficiently close to zero rounds to zero, which is underflow, and which is why a speed of 0.001 pixels per frame would leave the ball motionless. In fixed point the absolute error bound is the same across the whole range.
 UNDERSTAND NOW: fixed point.
 For the lecturer: 0.1 x 256 = 25.6, rounded to 26. With SPEED_Q8 = 1 the ball moves 1/256 pixel per frame; a speed of 0.001 pixel per frame underflows to zero and the ball never moves.</a:t>
             </a:r>
@@ -2279,7 +2279,7 @@
           <a:p>
             <a:r>
               <a:rPr lang="en-US" dirty="0"/>
-              <a:t>A real number is written as a pair: a mantissa m and an exponent e, such that x is m times the base raised to e. It is the scientific notation of the physics laboratory. The point "floats" because the exponent says where it is. Since the same number has infinitely many such pairs, one is chosen by a rule, normalisation: the point is placed just after the first significant digit, so 346.09801 becomes 3.4609801 with exponent 2.
+              <a:t>A real number is represented as a pair: a mantissa m and an exponent e, such that x equals m multiplied by the base raised to e. This is the scientific notation of the physics laboratory, and the point "floats" because the exponent determines its position. Since the same number admits infinitely many such pairs, a canonical one is selected by normalisation: the point is placed immediately after the first significant digit, so 346.09801 becomes 3.4609801 with exponent 2. Normalisation guarantees uniqueness and maximises the number of significant digits retained.
 UNDERSTAND NOW: IEEE 754 floating point.
 For the lecturer: Scientific notation, in other words. Fixed point spends its bits on a fixed range; floating point spends some bits to say where the range is.</a:t>
             </a:r>
@@ -3359,7 +3359,7 @@
                 <a:ea typeface="Calibri" pitchFamily="34" charset="-122"/>
                 <a:cs typeface="Calibri" pitchFamily="34" charset="-120"/>
               </a:rPr>
-              <a:t>06-Computer_Architecture-Number_Representation_Reals-Code.pptx</a:t>
+              <a:t>06-Computer_Architecture-Number_Representation_Reals-Lab.pptx</a:t>
             </a:r>
             <a:endParaRPr lang="en-US" sz="1300" dirty="0"/>
           </a:p>

--- a/en/slides/06-Computer_Architecture-Number_Representation_Reals.pptx
+++ b/en/slides/06-Computer_Architecture-Number_Representation_Reals.pptx
@@ -126,13 +126,13 @@
   <p:extLst>
     <p:ext uri="{521415D9-36F7-43E2-AB2F-B90AF26B5E84}">
       <p14:sectionLst xmlns:p14="http://schemas.microsoft.com/office/powerpoint/2010/main">
-        <p14:section name="Opening" id="{4eabdd4b-746b-9715-6b40-852613d10dd0}">
+        <p14:section name="Opening" id="{a4a4e8d0-f7af-d8c5-e7ba-123c3fc4f4fa}">
           <p14:sldIdLst>
             <p14:sldId id="256"/>
             <p14:sldId id="257"/>
           </p14:sldIdLst>
         </p14:section>
-        <p14:section name="More encodings for signed integers" id="{9003a16d-b393-c37f-d6f4-af0a8ad1942b}">
+        <p14:section name="More encodings for signed integers" id="{654f86fe-f290-2e8e-4ea6-152b3bdd7f59}">
           <p14:sldIdLst>
             <p14:sldId id="258"/>
             <p14:sldId id="259"/>
@@ -140,13 +140,13 @@
             <p14:sldId id="261"/>
           </p14:sldIdLst>
         </p14:section>
-        <p14:section name="Fixed point" id="{3b6a253d-fb63-9de1-00bd-2ff108b8630f}">
+        <p14:section name="Fixed point" id="{68763e08-8d85-305a-9398-de7e2ca68f98}">
           <p14:sldIdLst>
             <p14:sldId id="262"/>
             <p14:sldId id="263"/>
           </p14:sldIdLst>
         </p14:section>
-        <p14:section name="Floating point" id="{35a535c0-6716-4fcd-3210-49f13fc791c1}">
+        <p14:section name="Floating point" id="{58b13acc-05bb-d824-96fb-56ea4f7d1acf}">
           <p14:sldIdLst>
             <p14:sldId id="264"/>
             <p14:sldId id="265"/>
@@ -156,7 +156,7 @@
             <p14:sldId id="269"/>
           </p14:sldIdLst>
         </p14:section>
-        <p14:section name="Back to the machine" id="{1733fcce-f13e-7b37-4688-346328ed39b7}">
+        <p14:section name="Back to the machine" id="{fa4f1cc0-349b-8ba7-3ffb-5e88d4508fbb}">
           <p14:sldIdLst>
             <p14:sldId id="270"/>
             <p14:sldId id="271"/>

--- a/en/slides/06-Computer_Architecture-Number_Representation_Reals.pptx
+++ b/en/slides/06-Computer_Architecture-Number_Representation_Reals.pptx
@@ -126,13 +126,13 @@
   <p:extLst>
     <p:ext uri="{521415D9-36F7-43E2-AB2F-B90AF26B5E84}">
       <p14:sectionLst xmlns:p14="http://schemas.microsoft.com/office/powerpoint/2010/main">
-        <p14:section name="Opening" id="{a4a4e8d0-f7af-d8c5-e7ba-123c3fc4f4fa}">
+        <p14:section name="Opening" id="{ecbb08d6-a9ac-05ce-f1b1-952c985e64a2}">
           <p14:sldIdLst>
             <p14:sldId id="256"/>
             <p14:sldId id="257"/>
           </p14:sldIdLst>
         </p14:section>
-        <p14:section name="More encodings for signed integers" id="{654f86fe-f290-2e8e-4ea6-152b3bdd7f59}">
+        <p14:section name="More encodings for signed integers" id="{7cb7e069-ba5b-9ab6-69e1-a5554dc04523}">
           <p14:sldIdLst>
             <p14:sldId id="258"/>
             <p14:sldId id="259"/>
@@ -140,13 +140,13 @@
             <p14:sldId id="261"/>
           </p14:sldIdLst>
         </p14:section>
-        <p14:section name="Fixed point" id="{68763e08-8d85-305a-9398-de7e2ca68f98}">
+        <p14:section name="Fixed point" id="{cf97521d-a1fa-c328-d4bb-8bf43b808a81}">
           <p14:sldIdLst>
             <p14:sldId id="262"/>
             <p14:sldId id="263"/>
           </p14:sldIdLst>
         </p14:section>
-        <p14:section name="Floating point" id="{58b13acc-05bb-d824-96fb-56ea4f7d1acf}">
+        <p14:section name="Floating point" id="{c538a583-b572-c93c-de63-e34f6f10e022}">
           <p14:sldIdLst>
             <p14:sldId id="264"/>
             <p14:sldId id="265"/>
@@ -156,7 +156,7 @@
             <p14:sldId id="269"/>
           </p14:sldIdLst>
         </p14:section>
-        <p14:section name="Back to the machine" id="{fa4f1cc0-349b-8ba7-3ffb-5e88d4508fbb}">
+        <p14:section name="Back to the machine" id="{d4f13044-3a9c-24c0-174e-cee7508ea1a3}">
           <p14:sldIdLst>
             <p14:sldId id="270"/>
             <p14:sldId id="271"/>
@@ -573,6 +573,7 @@
               <a:t>The previous lecture treated integers; this one treats numbers with a fractional part. It begins from a concrete engineering problem: a ball must move by less than one pixel per frame, on a processor with no instructions for real numbers. The first solution, fixed point, uses nothing beyond integer arithmetic already understood. Floating point then emerges as the general solution, together with the standard to which essentially every computer conforms, IEEE 754. The lecture is thus organised as a progression from a specific constraint to a general theory, and back to the constraint.
 Learning status: UNDERSTAND NOW, by the end of this lecture you explain it, trace it and apply it on your own; USE NOW, you follow and use the recipe today; how it works inside is explained later, or is not part of the course; UNDERSTAND LATER, recognise the name and what it is for; a later lecture explains it. A slide without a badge is context: a story, an example, a question, an exercise.
 Learning status of this lecture. UNDERSTAND NOW: fixed point; one's complement and excess-k; IEEE 754 floating point; the name RV32IMAC. USE NOW: the complete program, the PRG32 tools (used, not studied, in this course). UNDERSTAND LATER: nothing. A slide without a badge is context: a story, an example, a question, an exercise.
+Roadmap. Today's outcomes: (1) represent a real number in fixed point and compute with it using integer instructions; (2) decode an IEEE 754 single-precision number; (3) read the name RV32IMAC and say what the kit can and cannot compute in hardware. Builds on: only what Lecture 01 set up. Next: Lecture 07, Verm1, Part 1: A Head That Crosses the World.
 For the lecturer: Spiral: the lecture opens with a ball that must move less than one pixel per frame on a processor with no floating-point unit. Fixed point solves it; floating point is then presented as the general answer, with IEEE 754.</a:t>
             </a:r>
             <a:endParaRPr lang="en-US" dirty="0"/>
@@ -1650,7 +1651,7 @@
             <a:r>
               <a:rPr lang="en-US" dirty="0"/>
               <a:t>Five conclusions. Integers admit several representations, chosen according to use. Fixed point stores a fraction as a scaled integer, with constant absolute error and the speed of integer arithmetic. Floating point stores mantissa and exponent, with an enormous range and approximately constant relative error. IEEE 754 is the universal standard, with special patterns for zero, infinity and NaN. On a processor lacking the F extension, fixed point is the natural choice. The next lecture is the first part of Verm1, in which the content of the last four lectures is put to work.
-Learning status, recap. UNDERSTAND NOW: fixed point; one's complement and excess-k; IEEE 754 floating point; the name RV32IMAC. USE NOW: the complete program, the PRG32 tools (used, not studied, in this course). UNDERSTAND LATER: nothing. A slide without a badge is context: a story, an example, a question, an exercise.
+Learning status, recap. UNDERSTAND NOW: fixed point; one's complement and excess-k; IEEE 754 floating point; the name RV32IMAC. USE NOW: the complete program, the PRG32 tools (used, not studied, in this course). UNDERSTAND LATER: nothing. A slide without a badge is context: a story, an example, a question, an exercise. Closing thread: Without an F extension, fractions are integers with an agreed scale: Verm1 will move its head by fractions of a cell exactly this way. Next: the first part of the project. Exit ticket (two to four minutes, alone, on paper): 1. Read RV32IMAC letter by letter. A student writes fmul.s in a cartridge for the kit: what happens, and why does Verm1 move with fixed-point numbers? 2. In Q24.8, which real number does the word 0x00000180 represent? How do you add two Q24.8 numbers, and how do you multiply them?
 For the lecturer: Next: Verm1, part 1, where the first four lectures go to work in a real program. Then Boolean algebra.</a:t>
             </a:r>
             <a:endParaRPr lang="en-US" dirty="0"/>
